--- a/Product-minded Engineer/Product-minded engineer.pptx
+++ b/Product-minded Engineer/Product-minded engineer.pptx
@@ -54,6 +54,9 @@
     <p:embeddedFont>
       <p:font typeface="Poppins" panose="00000500000000000000" pitchFamily="2" charset="0"/>
       <p:regular r:id="rId37"/>
+      <p:bold r:id="rId38"/>
+      <p:italic r:id="rId39"/>
+      <p:boldItalic r:id="rId40"/>
     </p:embeddedFont>
   </p:embeddedFontLst>
   <p:defaultTextStyle>
@@ -10269,7 +10272,7 @@
           <a:p>
             <a:fld id="{0B2A5286-0306-B143-BA49-3E397476CCE1}" type="datetimeFigureOut">
               <a:rPr lang="en-RO" smtClean="0"/>
-              <a:t>12/24/2025</a:t>
+              <a:t>05/30/2026</a:t>
             </a:fld>
             <a:endParaRPr lang="en-RO"/>
           </a:p>
@@ -10618,42 +10621,7 @@
                 <a:sym typeface="Poppins Bold"/>
               </a:defRPr>
             </a:pPr>
-            <a:r>
-              <a:rPr b="1" dirty="0">
-                <a:latin typeface="Dava Sans" pitchFamily="2" charset="77"/>
-              </a:rPr>
-              <a:t>Agenda</a:t>
-            </a:r>
-          </a:p>
-          <a:p>
-            <a:r>
-              <a:rPr dirty="0"/>
-              <a:t>General Template Guidance: Information to help you make good presentations.</a:t>
-            </a:r>
-          </a:p>
-          <a:p>
-            <a:r>
-              <a:rPr dirty="0"/>
-              <a:t>Standard / Static Slides: Some key Endava slides/lockups that, in general, should only be modified by marketing.</a:t>
-            </a:r>
-          </a:p>
-          <a:p>
-            <a:r>
-              <a:rPr dirty="0"/>
-              <a:t>Template Slides: A selection of template slides for use in Endava presentations.</a:t>
-            </a:r>
-          </a:p>
-          <a:p>
-            <a:r>
-              <a:rPr dirty="0"/>
-              <a:t>Larger Format Template Slides: Template slides with larger content.</a:t>
-            </a:r>
-          </a:p>
-          <a:p>
-            <a:r>
-              <a:rPr dirty="0"/>
-              <a:t>Icon Library: A selection of hundreds of icons to use in Endava presentations.</a:t>
-            </a:r>
+            <a:endParaRPr dirty="0"/>
           </a:p>
         </p:txBody>
       </p:sp>
@@ -10754,24 +10722,7 @@
                 <a:sym typeface="Poppins Bold"/>
               </a:defRPr>
             </a:pPr>
-            <a:r>
-              <a:rPr b="1" dirty="0">
-                <a:latin typeface="Dava Sans" pitchFamily="2" charset="77"/>
-              </a:rPr>
-              <a:t>Presentation Matters</a:t>
-            </a:r>
-          </a:p>
-          <a:p>
-            <a:r>
-              <a:rPr dirty="0"/>
-              <a:t>This slide provides justification for caring about how your presentations look and feel. </a:t>
-            </a:r>
-          </a:p>
-          <a:p>
-            <a:r>
-              <a:rPr dirty="0"/>
-              <a:t>It can also be used as a template slide. Change the header (and footer) to reflect the client, presentation name, and chapter title. To change the header and footer, click “edit master” and change the header and footer on all the master slides to have the same client and presentation name across all pages.</a:t>
-            </a:r>
+            <a:endParaRPr dirty="0"/>
           </a:p>
         </p:txBody>
       </p:sp>
@@ -10877,24 +10828,7 @@
                 <a:sym typeface="Poppins Bold"/>
               </a:defRPr>
             </a:pPr>
-            <a:r>
-              <a:rPr b="1" dirty="0">
-                <a:latin typeface="Dava Sans" pitchFamily="2" charset="77"/>
-              </a:rPr>
-              <a:t>Presentation Matters</a:t>
-            </a:r>
-          </a:p>
-          <a:p>
-            <a:r>
-              <a:rPr dirty="0"/>
-              <a:t>This slide provides justification for caring about how your presentations look and feel. </a:t>
-            </a:r>
-          </a:p>
-          <a:p>
-            <a:r>
-              <a:rPr dirty="0"/>
-              <a:t>It can also be used as a template slide. Change the header (and footer) to reflect the client, presentation name, and chapter title. To change the header and footer, click “edit master” and change the header and footer on all the master slides to have the same client and presentation name across all pages.</a:t>
-            </a:r>
+            <a:endParaRPr dirty="0"/>
           </a:p>
         </p:txBody>
       </p:sp>
@@ -11000,24 +10934,7 @@
                 <a:sym typeface="Poppins Bold"/>
               </a:defRPr>
             </a:pPr>
-            <a:r>
-              <a:rPr b="1" dirty="0">
-                <a:latin typeface="Dava Sans" pitchFamily="2" charset="77"/>
-              </a:rPr>
-              <a:t>Presentation Matters</a:t>
-            </a:r>
-          </a:p>
-          <a:p>
-            <a:r>
-              <a:rPr dirty="0"/>
-              <a:t>This slide provides justification for caring about how your presentations look and feel. </a:t>
-            </a:r>
-          </a:p>
-          <a:p>
-            <a:r>
-              <a:rPr dirty="0"/>
-              <a:t>It can also be used as a template slide. Change the header (and footer) to reflect the client, presentation name, and chapter title. To change the header and footer, click “edit master” and change the header and footer on all the master slides to have the same client and presentation name across all pages.</a:t>
-            </a:r>
+            <a:endParaRPr dirty="0"/>
           </a:p>
         </p:txBody>
       </p:sp>
@@ -11123,24 +11040,7 @@
                 <a:sym typeface="Poppins Bold"/>
               </a:defRPr>
             </a:pPr>
-            <a:r>
-              <a:rPr b="1" dirty="0">
-                <a:latin typeface="Dava Sans" pitchFamily="2" charset="77"/>
-              </a:rPr>
-              <a:t>Presentation Matters</a:t>
-            </a:r>
-          </a:p>
-          <a:p>
-            <a:r>
-              <a:rPr dirty="0"/>
-              <a:t>This slide provides justification for caring about how your presentations look and feel. </a:t>
-            </a:r>
-          </a:p>
-          <a:p>
-            <a:r>
-              <a:rPr dirty="0"/>
-              <a:t>It can also be used as a template slide. Change the header (and footer) to reflect the client, presentation name, and chapter title. To change the header and footer, click “edit master” and change the header and footer on all the master slides to have the same client and presentation name across all pages.</a:t>
-            </a:r>
+            <a:endParaRPr dirty="0"/>
           </a:p>
         </p:txBody>
       </p:sp>
@@ -11228,24 +11128,7 @@
                 <a:sym typeface="Poppins Bold"/>
               </a:defRPr>
             </a:pPr>
-            <a:r>
-              <a:rPr b="1" dirty="0">
-                <a:latin typeface="Dava Sans" pitchFamily="2" charset="77"/>
-              </a:rPr>
-              <a:t>Presentation Principles</a:t>
-            </a:r>
-          </a:p>
-          <a:p>
-            <a:r>
-              <a:rPr dirty="0"/>
-              <a:t>This slide provides a handful of key ideas to help you make great presentations.</a:t>
-            </a:r>
-          </a:p>
-          <a:p>
-            <a:r>
-              <a:rPr dirty="0"/>
-              <a:t>It can also be used as a template slide. Change the header (and footer) to reflect the client, presentation name, and chapter title. To change the header and footer, click “edit master” and change the header and footer on all the master slides to have the same client and presentation name across all pages.</a:t>
-            </a:r>
+            <a:endParaRPr dirty="0"/>
           </a:p>
         </p:txBody>
       </p:sp>
@@ -11333,24 +11216,7 @@
                 <a:sym typeface="Poppins Bold"/>
               </a:defRPr>
             </a:pPr>
-            <a:r>
-              <a:rPr b="1" dirty="0">
-                <a:latin typeface="Dava Sans" pitchFamily="2" charset="77"/>
-              </a:rPr>
-              <a:t>Presentation Matters</a:t>
-            </a:r>
-          </a:p>
-          <a:p>
-            <a:r>
-              <a:rPr dirty="0"/>
-              <a:t>This slide provides justification for caring about how your presentations look and feel. </a:t>
-            </a:r>
-          </a:p>
-          <a:p>
-            <a:r>
-              <a:rPr dirty="0"/>
-              <a:t>It can also be used as a template slide. Change the header (and footer) to reflect the client, presentation name, and chapter title. To change the header and footer, click “edit master” and change the header and footer on all the master slides to have the same client and presentation name across all pages.</a:t>
-            </a:r>
+            <a:endParaRPr dirty="0"/>
           </a:p>
         </p:txBody>
       </p:sp>
@@ -11456,24 +11322,7 @@
                 <a:sym typeface="Poppins Bold"/>
               </a:defRPr>
             </a:pPr>
-            <a:r>
-              <a:rPr b="1" dirty="0">
-                <a:latin typeface="Dava Sans" pitchFamily="2" charset="77"/>
-              </a:rPr>
-              <a:t>Presentation Matters</a:t>
-            </a:r>
-          </a:p>
-          <a:p>
-            <a:r>
-              <a:rPr dirty="0"/>
-              <a:t>This slide provides justification for caring about how your presentations look and feel. </a:t>
-            </a:r>
-          </a:p>
-          <a:p>
-            <a:r>
-              <a:rPr dirty="0"/>
-              <a:t>It can also be used as a template slide. Change the header (and footer) to reflect the client, presentation name, and chapter title. To change the header and footer, click “edit master” and change the header and footer on all the master slides to have the same client and presentation name across all pages.</a:t>
-            </a:r>
+            <a:endParaRPr dirty="0"/>
           </a:p>
         </p:txBody>
       </p:sp>
@@ -11579,24 +11428,7 @@
                 <a:sym typeface="Poppins Bold"/>
               </a:defRPr>
             </a:pPr>
-            <a:r>
-              <a:rPr b="1" dirty="0">
-                <a:latin typeface="Dava Sans" pitchFamily="2" charset="77"/>
-              </a:rPr>
-              <a:t>Presentation Matters</a:t>
-            </a:r>
-          </a:p>
-          <a:p>
-            <a:r>
-              <a:rPr dirty="0"/>
-              <a:t>This slide provides justification for caring about how your presentations look and feel. </a:t>
-            </a:r>
-          </a:p>
-          <a:p>
-            <a:r>
-              <a:rPr dirty="0"/>
-              <a:t>It can also be used as a template slide. Change the header (and footer) to reflect the client, presentation name, and chapter title. To change the header and footer, click “edit master” and change the header and footer on all the master slides to have the same client and presentation name across all pages.</a:t>
-            </a:r>
+            <a:endParaRPr dirty="0"/>
           </a:p>
         </p:txBody>
       </p:sp>
@@ -11702,24 +11534,7 @@
                 <a:sym typeface="Poppins Bold"/>
               </a:defRPr>
             </a:pPr>
-            <a:r>
-              <a:rPr b="1" dirty="0">
-                <a:latin typeface="Dava Sans" pitchFamily="2" charset="77"/>
-              </a:rPr>
-              <a:t>Presentation Matters</a:t>
-            </a:r>
-          </a:p>
-          <a:p>
-            <a:r>
-              <a:rPr dirty="0"/>
-              <a:t>This slide provides justification for caring about how your presentations look and feel. </a:t>
-            </a:r>
-          </a:p>
-          <a:p>
-            <a:r>
-              <a:rPr dirty="0"/>
-              <a:t>It can also be used as a template slide. Change the header (and footer) to reflect the client, presentation name, and chapter title. To change the header and footer, click “edit master” and change the header and footer on all the master slides to have the same client and presentation name across all pages.</a:t>
-            </a:r>
+            <a:endParaRPr dirty="0"/>
           </a:p>
         </p:txBody>
       </p:sp>
@@ -11807,24 +11622,7 @@
                 <a:sym typeface="Poppins Bold"/>
               </a:defRPr>
             </a:pPr>
-            <a:r>
-              <a:rPr b="1" dirty="0">
-                <a:latin typeface="Dava Sans" pitchFamily="2" charset="77"/>
-              </a:rPr>
-              <a:t>Presentation Matters</a:t>
-            </a:r>
-          </a:p>
-          <a:p>
-            <a:r>
-              <a:rPr dirty="0"/>
-              <a:t>This slide provides justification for caring about how your presentations look and feel. </a:t>
-            </a:r>
-          </a:p>
-          <a:p>
-            <a:r>
-              <a:rPr dirty="0"/>
-              <a:t>It can also be used as a template slide. Change the header (and footer) to reflect the client, presentation name, and chapter title. To change the header and footer, click “edit master” and change the header and footer on all the master slides to have the same client and presentation name across all pages.</a:t>
-            </a:r>
+            <a:endParaRPr dirty="0"/>
           </a:p>
         </p:txBody>
       </p:sp>
@@ -11912,24 +11710,7 @@
                 <a:sym typeface="Poppins Bold"/>
               </a:defRPr>
             </a:pPr>
-            <a:r>
-              <a:rPr b="1" dirty="0">
-                <a:latin typeface="Dava Sans" pitchFamily="2" charset="77"/>
-              </a:rPr>
-              <a:t>Presentation Matters</a:t>
-            </a:r>
-          </a:p>
-          <a:p>
-            <a:r>
-              <a:rPr dirty="0"/>
-              <a:t>This slide provides justification for caring about how your presentations look and feel. </a:t>
-            </a:r>
-          </a:p>
-          <a:p>
-            <a:r>
-              <a:rPr dirty="0"/>
-              <a:t>It can also be used as a template slide. Change the header (and footer) to reflect the client, presentation name, and chapter title. To change the header and footer, click “edit master” and change the header and footer on all the master slides to have the same client and presentation name across all pages.</a:t>
-            </a:r>
+            <a:endParaRPr dirty="0"/>
           </a:p>
         </p:txBody>
       </p:sp>
@@ -12035,24 +11816,7 @@
                 <a:sym typeface="Poppins Bold"/>
               </a:defRPr>
             </a:pPr>
-            <a:r>
-              <a:rPr b="1" dirty="0">
-                <a:latin typeface="Dava Sans" pitchFamily="2" charset="77"/>
-              </a:rPr>
-              <a:t>Presentation Matters</a:t>
-            </a:r>
-          </a:p>
-          <a:p>
-            <a:r>
-              <a:rPr dirty="0"/>
-              <a:t>This slide provides justification for caring about how your presentations look and feel. </a:t>
-            </a:r>
-          </a:p>
-          <a:p>
-            <a:r>
-              <a:rPr dirty="0"/>
-              <a:t>It can also be used as a template slide. Change the header (and footer) to reflect the client, presentation name, and chapter title. To change the header and footer, click “edit master” and change the header and footer on all the master slides to have the same client and presentation name across all pages.</a:t>
-            </a:r>
+            <a:endParaRPr dirty="0"/>
           </a:p>
         </p:txBody>
       </p:sp>
@@ -12158,24 +11922,7 @@
                 <a:sym typeface="Poppins Bold"/>
               </a:defRPr>
             </a:pPr>
-            <a:r>
-              <a:rPr b="1" dirty="0">
-                <a:latin typeface="Dava Sans" pitchFamily="2" charset="77"/>
-              </a:rPr>
-              <a:t>Presentation Matters</a:t>
-            </a:r>
-          </a:p>
-          <a:p>
-            <a:r>
-              <a:rPr dirty="0"/>
-              <a:t>This slide provides justification for caring about how your presentations look and feel. </a:t>
-            </a:r>
-          </a:p>
-          <a:p>
-            <a:r>
-              <a:rPr dirty="0"/>
-              <a:t>It can also be used as a template slide. Change the header (and footer) to reflect the client, presentation name, and chapter title. To change the header and footer, click “edit master” and change the header and footer on all the master slides to have the same client and presentation name across all pages.</a:t>
-            </a:r>
+            <a:endParaRPr dirty="0"/>
           </a:p>
         </p:txBody>
       </p:sp>
@@ -12281,24 +12028,7 @@
                 <a:sym typeface="Poppins Bold"/>
               </a:defRPr>
             </a:pPr>
-            <a:r>
-              <a:rPr b="1" dirty="0">
-                <a:latin typeface="Dava Sans" pitchFamily="2" charset="77"/>
-              </a:rPr>
-              <a:t>Presentation Matters</a:t>
-            </a:r>
-          </a:p>
-          <a:p>
-            <a:r>
-              <a:rPr dirty="0"/>
-              <a:t>This slide provides justification for caring about how your presentations look and feel. </a:t>
-            </a:r>
-          </a:p>
-          <a:p>
-            <a:r>
-              <a:rPr dirty="0"/>
-              <a:t>It can also be used as a template slide. Change the header (and footer) to reflect the client, presentation name, and chapter title. To change the header and footer, click “edit master” and change the header and footer on all the master slides to have the same client and presentation name across all pages.</a:t>
-            </a:r>
+            <a:endParaRPr dirty="0"/>
           </a:p>
         </p:txBody>
       </p:sp>
@@ -12404,24 +12134,7 @@
                 <a:sym typeface="Poppins Bold"/>
               </a:defRPr>
             </a:pPr>
-            <a:r>
-              <a:rPr b="1" dirty="0">
-                <a:latin typeface="Dava Sans" pitchFamily="2" charset="77"/>
-              </a:rPr>
-              <a:t>Presentation Matters</a:t>
-            </a:r>
-          </a:p>
-          <a:p>
-            <a:r>
-              <a:rPr dirty="0"/>
-              <a:t>This slide provides justification for caring about how your presentations look and feel. </a:t>
-            </a:r>
-          </a:p>
-          <a:p>
-            <a:r>
-              <a:rPr dirty="0"/>
-              <a:t>It can also be used as a template slide. Change the header (and footer) to reflect the client, presentation name, and chapter title. To change the header and footer, click “edit master” and change the header and footer on all the master slides to have the same client and presentation name across all pages.</a:t>
-            </a:r>
+            <a:endParaRPr dirty="0"/>
           </a:p>
         </p:txBody>
       </p:sp>
@@ -12527,24 +12240,7 @@
                 <a:sym typeface="Poppins Bold"/>
               </a:defRPr>
             </a:pPr>
-            <a:r>
-              <a:rPr b="1" dirty="0">
-                <a:latin typeface="Dava Sans" pitchFamily="2" charset="77"/>
-              </a:rPr>
-              <a:t>Presentation Matters</a:t>
-            </a:r>
-          </a:p>
-          <a:p>
-            <a:r>
-              <a:rPr dirty="0"/>
-              <a:t>This slide provides justification for caring about how your presentations look and feel. </a:t>
-            </a:r>
-          </a:p>
-          <a:p>
-            <a:r>
-              <a:rPr dirty="0"/>
-              <a:t>It can also be used as a template slide. Change the header (and footer) to reflect the client, presentation name, and chapter title. To change the header and footer, click “edit master” and change the header and footer on all the master slides to have the same client and presentation name across all pages.</a:t>
-            </a:r>
+            <a:endParaRPr dirty="0"/>
           </a:p>
         </p:txBody>
       </p:sp>
@@ -12650,24 +12346,7 @@
                 <a:sym typeface="Poppins Bold"/>
               </a:defRPr>
             </a:pPr>
-            <a:r>
-              <a:rPr b="1" dirty="0">
-                <a:latin typeface="Dava Sans" pitchFamily="2" charset="77"/>
-              </a:rPr>
-              <a:t>Presentation Matters</a:t>
-            </a:r>
-          </a:p>
-          <a:p>
-            <a:r>
-              <a:rPr dirty="0"/>
-              <a:t>This slide provides justification for caring about how your presentations look and feel. </a:t>
-            </a:r>
-          </a:p>
-          <a:p>
-            <a:r>
-              <a:rPr dirty="0"/>
-              <a:t>It can also be used as a template slide. Change the header (and footer) to reflect the client, presentation name, and chapter title. To change the header and footer, click “edit master” and change the header and footer on all the master slides to have the same client and presentation name across all pages.</a:t>
-            </a:r>
+            <a:endParaRPr dirty="0"/>
           </a:p>
         </p:txBody>
       </p:sp>
@@ -12755,24 +12434,7 @@
                 <a:sym typeface="Poppins Bold"/>
               </a:defRPr>
             </a:pPr>
-            <a:r>
-              <a:rPr b="1" dirty="0">
-                <a:latin typeface="Dava Sans" pitchFamily="2" charset="77"/>
-              </a:rPr>
-              <a:t>Presentation Matters</a:t>
-            </a:r>
-          </a:p>
-          <a:p>
-            <a:r>
-              <a:rPr dirty="0"/>
-              <a:t>This slide provides justification for caring about how your presentations look and feel. </a:t>
-            </a:r>
-          </a:p>
-          <a:p>
-            <a:r>
-              <a:rPr dirty="0"/>
-              <a:t>It can also be used as a template slide. Change the header (and footer) to reflect the client, presentation name, and chapter title. To change the header and footer, click “edit master” and change the header and footer on all the master slides to have the same client and presentation name across all pages.</a:t>
-            </a:r>
+            <a:endParaRPr dirty="0"/>
           </a:p>
         </p:txBody>
       </p:sp>
@@ -12861,39 +12523,6 @@
           </a:p>
         </p:txBody>
       </p:sp>
-      <p:pic>
-        <p:nvPicPr>
-          <p:cNvPr id="28" name="endava_logo_neg_RGB.png" descr="endava_logo_neg_RGB.png"/>
-          <p:cNvPicPr>
-            <a:picLocks noChangeAspect="1"/>
-          </p:cNvPicPr>
-          <p:nvPr/>
-        </p:nvPicPr>
-        <p:blipFill>
-          <a:blip r:embed="rId2" cstate="screen">
-            <a:extLst>
-              <a:ext uri="{28A0092B-C50C-407E-A947-70E740481C1C}">
-                <a14:useLocalDpi xmlns:a14="http://schemas.microsoft.com/office/drawing/2010/main"/>
-              </a:ext>
-            </a:extLst>
-          </a:blip>
-          <a:stretch>
-            <a:fillRect/>
-          </a:stretch>
-        </p:blipFill>
-        <p:spPr>
-          <a:xfrm>
-            <a:off x="2593247" y="607284"/>
-            <a:ext cx="2480228" cy="421640"/>
-          </a:xfrm>
-          <a:prstGeom prst="rect">
-            <a:avLst/>
-          </a:prstGeom>
-          <a:ln w="12700">
-            <a:miter lim="400000"/>
-          </a:ln>
-        </p:spPr>
-      </p:pic>
       <p:sp>
         <p:nvSpPr>
           <p:cNvPr id="29" name="Slide Number"/>
@@ -13076,41 +12705,6 @@
           <a:chExt cx="0" cy="0"/>
         </a:xfrm>
       </p:grpSpPr>
-      <p:pic>
-        <p:nvPicPr>
-          <p:cNvPr id="50" name="endava_symbol_black_CMYK.pdf" descr="endava_symbol_black_CMYK.pdf"/>
-          <p:cNvPicPr>
-            <a:picLocks noChangeAspect="1"/>
-          </p:cNvPicPr>
-          <p:nvPr/>
-        </p:nvPicPr>
-        <p:blipFill>
-          <a:blip r:embed="rId2" cstate="screen">
-            <a:alphaModFix amt="50000"/>
-            <a:extLst>
-              <a:ext uri="{28A0092B-C50C-407E-A947-70E740481C1C}">
-                <a14:useLocalDpi xmlns:a14="http://schemas.microsoft.com/office/drawing/2010/main"/>
-              </a:ext>
-            </a:extLst>
-          </a:blip>
-          <a:srcRect/>
-          <a:stretch>
-            <a:fillRect/>
-          </a:stretch>
-        </p:blipFill>
-        <p:spPr>
-          <a:xfrm>
-            <a:off x="23434135" y="251730"/>
-            <a:ext cx="262850" cy="320676"/>
-          </a:xfrm>
-          <a:prstGeom prst="rect">
-            <a:avLst/>
-          </a:prstGeom>
-          <a:ln w="12700">
-            <a:miter lim="400000"/>
-          </a:ln>
-        </p:spPr>
-      </p:pic>
       <p:sp>
         <p:nvSpPr>
           <p:cNvPr id="51" name="Insert presentation name"/>
@@ -13130,7 +12724,7 @@
           </a:ln>
           <a:extLst>
             <a:ext uri="{C572A759-6A51-4108-AA02-DFA0A04FC94B}">
-              <ma14:wrappingTextBoxFlag xmlns:m="http://schemas.openxmlformats.org/officeDocument/2006/math" xmlns:a14="http://schemas.microsoft.com/office/drawing/2010/main" xmlns:ma14="http://schemas.microsoft.com/office/mac/drawingml/2011/main" xmlns="" val="1"/>
+              <ma14:wrappingTextBoxFlag xmlns="" xmlns:ma14="http://schemas.microsoft.com/office/mac/drawingml/2011/main" xmlns:a14="http://schemas.microsoft.com/office/drawing/2010/main" xmlns:m="http://schemas.openxmlformats.org/officeDocument/2006/math" val="1"/>
             </a:ext>
           </a:extLst>
         </p:spPr>
@@ -13168,7 +12762,7 @@
           <p:nvPr/>
         </p:nvPicPr>
         <p:blipFill>
-          <a:blip r:embed="rId3" cstate="screen">
+          <a:blip r:embed="rId2" cstate="screen">
             <a:extLst>
               <a:ext uri="{28A0092B-C50C-407E-A947-70E740481C1C}">
                 <a14:useLocalDpi xmlns:a14="http://schemas.microsoft.com/office/drawing/2010/main"/>
@@ -13212,7 +12806,7 @@
           </a:ln>
           <a:extLst>
             <a:ext uri="{C572A759-6A51-4108-AA02-DFA0A04FC94B}">
-              <ma14:wrappingTextBoxFlag xmlns:m="http://schemas.openxmlformats.org/officeDocument/2006/math" xmlns:a14="http://schemas.microsoft.com/office/drawing/2010/main" xmlns:ma14="http://schemas.microsoft.com/office/mac/drawingml/2011/main" xmlns="" val="1"/>
+              <ma14:wrappingTextBoxFlag xmlns="" xmlns:ma14="http://schemas.microsoft.com/office/mac/drawingml/2011/main" xmlns:a14="http://schemas.microsoft.com/office/drawing/2010/main" xmlns:m="http://schemas.openxmlformats.org/officeDocument/2006/math" val="1"/>
             </a:ext>
           </a:extLst>
         </p:spPr>
@@ -13618,41 +13212,6 @@
           </a:p>
         </p:txBody>
       </p:sp>
-      <p:pic>
-        <p:nvPicPr>
-          <p:cNvPr id="57" name="endava_symbol_RGB 1.png" descr="endava_symbol_RGB 1.png"/>
-          <p:cNvPicPr>
-            <a:picLocks noChangeAspect="1"/>
-          </p:cNvPicPr>
-          <p:nvPr userDrawn="1"/>
-        </p:nvPicPr>
-        <p:blipFill>
-          <a:blip r:embed="rId4" cstate="screen">
-            <a:alphaModFix amt="50000"/>
-            <a:extLst>
-              <a:ext uri="{28A0092B-C50C-407E-A947-70E740481C1C}">
-                <a14:useLocalDpi xmlns:a14="http://schemas.microsoft.com/office/drawing/2010/main"/>
-              </a:ext>
-            </a:extLst>
-          </a:blip>
-          <a:srcRect/>
-          <a:stretch>
-            <a:fillRect/>
-          </a:stretch>
-        </p:blipFill>
-        <p:spPr>
-          <a:xfrm>
-            <a:off x="23434135" y="251730"/>
-            <a:ext cx="262849" cy="320676"/>
-          </a:xfrm>
-          <a:prstGeom prst="rect">
-            <a:avLst/>
-          </a:prstGeom>
-          <a:ln w="12700">
-            <a:miter lim="400000"/>
-          </a:ln>
-        </p:spPr>
-      </p:pic>
       <p:sp>
         <p:nvSpPr>
           <p:cNvPr id="58" name="Slide Number"/>
@@ -13780,7 +13339,7 @@
           </a:ln>
           <a:extLst>
             <a:ext uri="{C572A759-6A51-4108-AA02-DFA0A04FC94B}">
-              <ma14:wrappingTextBoxFlag xmlns:m="http://schemas.openxmlformats.org/officeDocument/2006/math" xmlns:a14="http://schemas.microsoft.com/office/drawing/2010/main" xmlns:ma14="http://schemas.microsoft.com/office/mac/drawingml/2011/main" xmlns="" val="1"/>
+              <ma14:wrappingTextBoxFlag xmlns="" xmlns:ma14="http://schemas.microsoft.com/office/mac/drawingml/2011/main" xmlns:a14="http://schemas.microsoft.com/office/drawing/2010/main" xmlns:m="http://schemas.openxmlformats.org/officeDocument/2006/math" val="1"/>
             </a:ext>
           </a:extLst>
         </p:spPr>
@@ -14015,7 +13574,7 @@
           </a:ln>
           <a:extLst>
             <a:ext uri="{C572A759-6A51-4108-AA02-DFA0A04FC94B}">
-              <ma14:wrappingTextBoxFlag xmlns:m="http://schemas.openxmlformats.org/officeDocument/2006/math" xmlns:a14="http://schemas.microsoft.com/office/drawing/2010/main" xmlns:ma14="http://schemas.microsoft.com/office/mac/drawingml/2011/main" xmlns="" val="1"/>
+              <ma14:wrappingTextBoxFlag xmlns="" xmlns:ma14="http://schemas.microsoft.com/office/mac/drawingml/2011/main" xmlns:a14="http://schemas.microsoft.com/office/drawing/2010/main" xmlns:m="http://schemas.openxmlformats.org/officeDocument/2006/math" val="1"/>
             </a:ext>
           </a:extLst>
         </p:spPr>
@@ -14132,47 +13691,6 @@
           </a:p>
         </p:txBody>
       </p:sp>
-      <p:pic>
-        <p:nvPicPr>
-          <p:cNvPr id="2" name="endava_symbol_black_CMYK.pdf" descr="endava_symbol_black_CMYK.pdf">
-            <a:extLst>
-              <a:ext uri="{FF2B5EF4-FFF2-40B4-BE49-F238E27FC236}">
-                <a16:creationId xmlns:a16="http://schemas.microsoft.com/office/drawing/2014/main" id="{1C45B8D2-EBD5-5A95-3453-C9D68B49AA43}"/>
-              </a:ext>
-            </a:extLst>
-          </p:cNvPr>
-          <p:cNvPicPr>
-            <a:picLocks noChangeAspect="1"/>
-          </p:cNvPicPr>
-          <p:nvPr userDrawn="1"/>
-        </p:nvPicPr>
-        <p:blipFill>
-          <a:blip r:embed="rId2" cstate="screen">
-            <a:alphaModFix amt="50000"/>
-            <a:extLst>
-              <a:ext uri="{28A0092B-C50C-407E-A947-70E740481C1C}">
-                <a14:useLocalDpi xmlns:a14="http://schemas.microsoft.com/office/drawing/2010/main"/>
-              </a:ext>
-            </a:extLst>
-          </a:blip>
-          <a:srcRect/>
-          <a:stretch>
-            <a:fillRect/>
-          </a:stretch>
-        </p:blipFill>
-        <p:spPr>
-          <a:xfrm>
-            <a:off x="23434135" y="251730"/>
-            <a:ext cx="262850" cy="320676"/>
-          </a:xfrm>
-          <a:prstGeom prst="rect">
-            <a:avLst/>
-          </a:prstGeom>
-          <a:ln w="12700">
-            <a:miter lim="400000"/>
-          </a:ln>
-        </p:spPr>
-      </p:pic>
       <p:sp>
         <p:nvSpPr>
           <p:cNvPr id="3" name="Insert presentation name">
@@ -14198,7 +13716,7 @@
           </a:ln>
           <a:extLst>
             <a:ext uri="{C572A759-6A51-4108-AA02-DFA0A04FC94B}">
-              <ma14:wrappingTextBoxFlag xmlns:m="http://schemas.openxmlformats.org/officeDocument/2006/math" xmlns:a14="http://schemas.microsoft.com/office/drawing/2010/main" xmlns:ma14="http://schemas.microsoft.com/office/mac/drawingml/2011/main" xmlns="" val="1"/>
+              <ma14:wrappingTextBoxFlag xmlns="" xmlns:ma14="http://schemas.microsoft.com/office/mac/drawingml/2011/main" xmlns:a14="http://schemas.microsoft.com/office/drawing/2010/main" xmlns:m="http://schemas.openxmlformats.org/officeDocument/2006/math" val="1"/>
             </a:ext>
           </a:extLst>
         </p:spPr>
@@ -14257,41 +13775,6 @@
           <a:chExt cx="0" cy="0"/>
         </a:xfrm>
       </p:grpSpPr>
-      <p:pic>
-        <p:nvPicPr>
-          <p:cNvPr id="100" name="endava_symbol_RGB 1.png" descr="endava_symbol_RGB 1.png"/>
-          <p:cNvPicPr>
-            <a:picLocks noChangeAspect="1"/>
-          </p:cNvPicPr>
-          <p:nvPr userDrawn="1"/>
-        </p:nvPicPr>
-        <p:blipFill>
-          <a:blip r:embed="rId2" cstate="screen">
-            <a:alphaModFix amt="50000"/>
-            <a:extLst>
-              <a:ext uri="{28A0092B-C50C-407E-A947-70E740481C1C}">
-                <a14:useLocalDpi xmlns:a14="http://schemas.microsoft.com/office/drawing/2010/main"/>
-              </a:ext>
-            </a:extLst>
-          </a:blip>
-          <a:srcRect/>
-          <a:stretch>
-            <a:fillRect/>
-          </a:stretch>
-        </p:blipFill>
-        <p:spPr>
-          <a:xfrm>
-            <a:off x="23434135" y="251730"/>
-            <a:ext cx="262849" cy="320676"/>
-          </a:xfrm>
-          <a:prstGeom prst="rect">
-            <a:avLst/>
-          </a:prstGeom>
-          <a:ln w="12700">
-            <a:miter lim="400000"/>
-          </a:ln>
-        </p:spPr>
-      </p:pic>
       <p:sp>
         <p:nvSpPr>
           <p:cNvPr id="101" name="© Copyright 2023 Endava  •  Confidential and Proprietary  •  Version 1.0"/>
@@ -14311,7 +13794,7 @@
           </a:ln>
           <a:extLst>
             <a:ext uri="{C572A759-6A51-4108-AA02-DFA0A04FC94B}">
-              <ma14:wrappingTextBoxFlag xmlns:m="http://schemas.openxmlformats.org/officeDocument/2006/math" xmlns:a14="http://schemas.microsoft.com/office/drawing/2010/main" xmlns:ma14="http://schemas.microsoft.com/office/mac/drawingml/2011/main" xmlns="" val="1"/>
+              <ma14:wrappingTextBoxFlag xmlns="" xmlns:ma14="http://schemas.microsoft.com/office/mac/drawingml/2011/main" xmlns:a14="http://schemas.microsoft.com/office/drawing/2010/main" xmlns:m="http://schemas.openxmlformats.org/officeDocument/2006/math" val="1"/>
             </a:ext>
           </a:extLst>
         </p:spPr>
@@ -14358,7 +13841,7 @@
           </a:ln>
           <a:extLst>
             <a:ext uri="{C572A759-6A51-4108-AA02-DFA0A04FC94B}">
-              <ma14:wrappingTextBoxFlag xmlns:m="http://schemas.openxmlformats.org/officeDocument/2006/math" xmlns:a14="http://schemas.microsoft.com/office/drawing/2010/main" xmlns:ma14="http://schemas.microsoft.com/office/mac/drawingml/2011/main" xmlns="" val="1"/>
+              <ma14:wrappingTextBoxFlag xmlns="" xmlns:ma14="http://schemas.microsoft.com/office/mac/drawingml/2011/main" xmlns:a14="http://schemas.microsoft.com/office/drawing/2010/main" xmlns:m="http://schemas.openxmlformats.org/officeDocument/2006/math" val="1"/>
             </a:ext>
           </a:extLst>
         </p:spPr>
@@ -14539,7 +14022,7 @@
           </a:ln>
           <a:extLst>
             <a:ext uri="{C572A759-6A51-4108-AA02-DFA0A04FC94B}">
-              <ma14:wrappingTextBoxFlag xmlns:ma14="http://schemas.microsoft.com/office/mac/drawingml/2011/main" xmlns:a14="http://schemas.microsoft.com/office/drawing/2010/main" xmlns:m="http://schemas.openxmlformats.org/officeDocument/2006/math" xmlns="" val="1"/>
+              <ma14:wrappingTextBoxFlag xmlns="" xmlns:m="http://schemas.openxmlformats.org/officeDocument/2006/math" xmlns:a14="http://schemas.microsoft.com/office/drawing/2010/main" xmlns:ma14="http://schemas.microsoft.com/office/mac/drawingml/2011/main" val="1"/>
             </a:ext>
           </a:extLst>
         </p:spPr>
@@ -14651,7 +14134,7 @@
           </a:ln>
           <a:extLst>
             <a:ext uri="{C572A759-6A51-4108-AA02-DFA0A04FC94B}">
-              <ma14:wrappingTextBoxFlag xmlns:m="http://schemas.openxmlformats.org/officeDocument/2006/math" xmlns:a14="http://schemas.microsoft.com/office/drawing/2010/main" xmlns:ma14="http://schemas.microsoft.com/office/mac/drawingml/2011/main" xmlns="" val="1"/>
+              <ma14:wrappingTextBoxFlag xmlns="" xmlns:ma14="http://schemas.microsoft.com/office/mac/drawingml/2011/main" xmlns:a14="http://schemas.microsoft.com/office/drawing/2010/main" xmlns:m="http://schemas.openxmlformats.org/officeDocument/2006/math" val="1"/>
             </a:ext>
           </a:extLst>
         </p:spPr>
@@ -14691,7 +14174,7 @@
           </a:ln>
           <a:extLst>
             <a:ext uri="{C572A759-6A51-4108-AA02-DFA0A04FC94B}">
-              <ma14:wrappingTextBoxFlag xmlns:m="http://schemas.openxmlformats.org/officeDocument/2006/math" xmlns:a14="http://schemas.microsoft.com/office/drawing/2010/main" xmlns:ma14="http://schemas.microsoft.com/office/mac/drawingml/2011/main" xmlns="" val="1"/>
+              <ma14:wrappingTextBoxFlag xmlns="" xmlns:ma14="http://schemas.microsoft.com/office/mac/drawingml/2011/main" xmlns:a14="http://schemas.microsoft.com/office/drawing/2010/main" xmlns:m="http://schemas.openxmlformats.org/officeDocument/2006/math" val="1"/>
             </a:ext>
           </a:extLst>
         </p:spPr>
@@ -15791,7 +15274,7 @@
           </a:solidFill>
           <a:extLst>
             <a:ext uri="{C572A759-6A51-4108-AA02-DFA0A04FC94B}">
-              <ma14:wrappingTextBoxFlag xmlns:m="http://schemas.openxmlformats.org/officeDocument/2006/math" xmlns:a14="http://schemas.microsoft.com/office/drawing/2010/main" xmlns:ma14="http://schemas.microsoft.com/office/mac/drawingml/2011/main" xmlns="" val="1"/>
+              <ma14:wrappingTextBoxFlag xmlns="" xmlns:ma14="http://schemas.microsoft.com/office/mac/drawingml/2011/main" xmlns:a14="http://schemas.microsoft.com/office/drawing/2010/main" xmlns:m="http://schemas.openxmlformats.org/officeDocument/2006/math" val="1"/>
             </a:ext>
           </a:extLst>
         </p:spPr>
@@ -15832,7 +15315,7 @@
           </a:ln>
           <a:extLst>
             <a:ext uri="{C572A759-6A51-4108-AA02-DFA0A04FC94B}">
-              <ma14:wrappingTextBoxFlag xmlns:m="http://schemas.openxmlformats.org/officeDocument/2006/math" xmlns:a14="http://schemas.microsoft.com/office/drawing/2010/main" xmlns:ma14="http://schemas.microsoft.com/office/mac/drawingml/2011/main" xmlns="" val="1"/>
+              <ma14:wrappingTextBoxFlag xmlns="" xmlns:ma14="http://schemas.microsoft.com/office/mac/drawingml/2011/main" xmlns:a14="http://schemas.microsoft.com/office/drawing/2010/main" xmlns:m="http://schemas.openxmlformats.org/officeDocument/2006/math" val="1"/>
             </a:ext>
           </a:extLst>
         </p:spPr>
@@ -15921,7 +15404,7 @@
           </a:ln>
           <a:extLst>
             <a:ext uri="{C572A759-6A51-4108-AA02-DFA0A04FC94B}">
-              <ma14:wrappingTextBoxFlag xmlns:m="http://schemas.openxmlformats.org/officeDocument/2006/math" xmlns:a14="http://schemas.microsoft.com/office/drawing/2010/main" xmlns:ma14="http://schemas.microsoft.com/office/mac/drawingml/2011/main" xmlns="" val="1"/>
+              <ma14:wrappingTextBoxFlag xmlns="" xmlns:ma14="http://schemas.microsoft.com/office/mac/drawingml/2011/main" xmlns:a14="http://schemas.microsoft.com/office/drawing/2010/main" xmlns:m="http://schemas.openxmlformats.org/officeDocument/2006/math" val="1"/>
             </a:ext>
           </a:extLst>
         </p:spPr>
@@ -15981,7 +15464,7 @@
           </a:ln>
           <a:extLst>
             <a:ext uri="{C572A759-6A51-4108-AA02-DFA0A04FC94B}">
-              <ma14:wrappingTextBoxFlag xmlns:ma14="http://schemas.microsoft.com/office/mac/drawingml/2011/main" xmlns:a14="http://schemas.microsoft.com/office/drawing/2010/main" xmlns:m="http://schemas.openxmlformats.org/officeDocument/2006/math" xmlns="" val="1"/>
+              <ma14:wrappingTextBoxFlag xmlns="" xmlns:m="http://schemas.openxmlformats.org/officeDocument/2006/math" xmlns:a14="http://schemas.microsoft.com/office/drawing/2010/main" xmlns:ma14="http://schemas.microsoft.com/office/mac/drawingml/2011/main" val="1"/>
             </a:ext>
           </a:extLst>
         </p:spPr>
@@ -16040,7 +15523,7 @@
           </a:ln>
           <a:extLst>
             <a:ext uri="{C572A759-6A51-4108-AA02-DFA0A04FC94B}">
-              <ma14:wrappingTextBoxFlag xmlns="" xmlns:ma14="http://schemas.microsoft.com/office/mac/drawingml/2011/main" xmlns:a14="http://schemas.microsoft.com/office/drawing/2010/main" xmlns:m="http://schemas.openxmlformats.org/officeDocument/2006/math" val="1"/>
+              <ma14:wrappingTextBoxFlag xmlns:m="http://schemas.openxmlformats.org/officeDocument/2006/math" xmlns:a14="http://schemas.microsoft.com/office/drawing/2010/main" xmlns:ma14="http://schemas.microsoft.com/office/mac/drawingml/2011/main" xmlns="" val="1"/>
             </a:ext>
           </a:extLst>
         </p:spPr>
@@ -16160,13 +15643,13 @@
           <p:nvPr/>
         </p:nvPicPr>
         <p:blipFill>
-          <a:blip r:embed="rId3">
+          <a:blip>
             <a:extLst>
               <a:ext uri="{28A0092B-C50C-407E-A947-70E740481C1C}">
                 <a14:useLocalDpi xmlns:a14="http://schemas.microsoft.com/office/drawing/2010/main"/>
               </a:ext>
               <a:ext uri="{96DAC541-7B7A-43D3-8B79-37D633B846F1}">
-                <asvg:svgBlip xmlns:asvg="http://schemas.microsoft.com/office/drawing/2016/SVG/main" r:embed="rId4"/>
+                <asvg:svgBlip xmlns:asvg="http://schemas.microsoft.com/office/drawing/2016/SVG/main" r:embed="rId3"/>
               </a:ext>
             </a:extLst>
           </a:blip>
@@ -16338,7 +15821,7 @@
           </a:solidFill>
           <a:extLst>
             <a:ext uri="{C572A759-6A51-4108-AA02-DFA0A04FC94B}">
-              <ma14:wrappingTextBoxFlag xmlns:m="http://schemas.openxmlformats.org/officeDocument/2006/math" xmlns:a14="http://schemas.microsoft.com/office/drawing/2010/main" xmlns:ma14="http://schemas.microsoft.com/office/mac/drawingml/2011/main" xmlns="" val="1"/>
+              <ma14:wrappingTextBoxFlag xmlns="" xmlns:ma14="http://schemas.microsoft.com/office/mac/drawingml/2011/main" xmlns:a14="http://schemas.microsoft.com/office/drawing/2010/main" xmlns:m="http://schemas.openxmlformats.org/officeDocument/2006/math" val="1"/>
             </a:ext>
           </a:extLst>
         </p:spPr>
@@ -16379,7 +15862,7 @@
           </a:ln>
           <a:extLst>
             <a:ext uri="{C572A759-6A51-4108-AA02-DFA0A04FC94B}">
-              <ma14:wrappingTextBoxFlag xmlns:m="http://schemas.openxmlformats.org/officeDocument/2006/math" xmlns:a14="http://schemas.microsoft.com/office/drawing/2010/main" xmlns:ma14="http://schemas.microsoft.com/office/mac/drawingml/2011/main" xmlns="" val="1"/>
+              <ma14:wrappingTextBoxFlag xmlns="" xmlns:ma14="http://schemas.microsoft.com/office/mac/drawingml/2011/main" xmlns:a14="http://schemas.microsoft.com/office/drawing/2010/main" xmlns:m="http://schemas.openxmlformats.org/officeDocument/2006/math" val="1"/>
             </a:ext>
           </a:extLst>
         </p:spPr>
@@ -16499,7 +15982,7 @@
           </a:ln>
           <a:extLst>
             <a:ext uri="{C572A759-6A51-4108-AA02-DFA0A04FC94B}">
-              <ma14:wrappingTextBoxFlag xmlns:ma14="http://schemas.microsoft.com/office/mac/drawingml/2011/main" xmlns:a14="http://schemas.microsoft.com/office/drawing/2010/main" xmlns:m="http://schemas.openxmlformats.org/officeDocument/2006/math" xmlns="" val="1"/>
+              <ma14:wrappingTextBoxFlag xmlns="" xmlns:m="http://schemas.openxmlformats.org/officeDocument/2006/math" xmlns:a14="http://schemas.microsoft.com/office/drawing/2010/main" xmlns:ma14="http://schemas.microsoft.com/office/mac/drawingml/2011/main" val="1"/>
             </a:ext>
           </a:extLst>
         </p:spPr>
@@ -16558,7 +16041,7 @@
           </a:ln>
           <a:extLst>
             <a:ext uri="{C572A759-6A51-4108-AA02-DFA0A04FC94B}">
-              <ma14:wrappingTextBoxFlag xmlns="" xmlns:ma14="http://schemas.microsoft.com/office/mac/drawingml/2011/main" xmlns:a14="http://schemas.microsoft.com/office/drawing/2010/main" xmlns:m="http://schemas.openxmlformats.org/officeDocument/2006/math" val="1"/>
+              <ma14:wrappingTextBoxFlag xmlns:m="http://schemas.openxmlformats.org/officeDocument/2006/math" xmlns:a14="http://schemas.microsoft.com/office/drawing/2010/main" xmlns:ma14="http://schemas.microsoft.com/office/mac/drawingml/2011/main" xmlns="" val="1"/>
             </a:ext>
           </a:extLst>
         </p:spPr>
@@ -16675,7 +16158,7 @@
           </a:ln>
           <a:extLst>
             <a:ext uri="{C572A759-6A51-4108-AA02-DFA0A04FC94B}">
-              <ma14:wrappingTextBoxFlag xmlns:m="http://schemas.openxmlformats.org/officeDocument/2006/math" xmlns:a14="http://schemas.microsoft.com/office/drawing/2010/main" xmlns:ma14="http://schemas.microsoft.com/office/mac/drawingml/2011/main" xmlns="" val="1"/>
+              <ma14:wrappingTextBoxFlag xmlns="" xmlns:ma14="http://schemas.microsoft.com/office/mac/drawingml/2011/main" xmlns:a14="http://schemas.microsoft.com/office/drawing/2010/main" xmlns:m="http://schemas.openxmlformats.org/officeDocument/2006/math" val="1"/>
             </a:ext>
           </a:extLst>
         </p:spPr>
@@ -16725,13 +16208,13 @@
           <p:nvPr/>
         </p:nvPicPr>
         <p:blipFill>
-          <a:blip r:embed="rId3">
+          <a:blip>
             <a:extLst>
               <a:ext uri="{28A0092B-C50C-407E-A947-70E740481C1C}">
                 <a14:useLocalDpi xmlns:a14="http://schemas.microsoft.com/office/drawing/2010/main"/>
               </a:ext>
               <a:ext uri="{96DAC541-7B7A-43D3-8B79-37D633B846F1}">
-                <asvg:svgBlip xmlns:asvg="http://schemas.microsoft.com/office/drawing/2016/SVG/main" r:embed="rId4"/>
+                <asvg:svgBlip xmlns:asvg="http://schemas.microsoft.com/office/drawing/2016/SVG/main" r:embed="rId3"/>
               </a:ext>
             </a:extLst>
           </a:blip>
@@ -16907,7 +16390,7 @@
           </a:solidFill>
           <a:extLst>
             <a:ext uri="{C572A759-6A51-4108-AA02-DFA0A04FC94B}">
-              <ma14:wrappingTextBoxFlag xmlns:m="http://schemas.openxmlformats.org/officeDocument/2006/math" xmlns:a14="http://schemas.microsoft.com/office/drawing/2010/main" xmlns:ma14="http://schemas.microsoft.com/office/mac/drawingml/2011/main" xmlns="" val="1"/>
+              <ma14:wrappingTextBoxFlag xmlns="" xmlns:ma14="http://schemas.microsoft.com/office/mac/drawingml/2011/main" xmlns:a14="http://schemas.microsoft.com/office/drawing/2010/main" xmlns:m="http://schemas.openxmlformats.org/officeDocument/2006/math" val="1"/>
             </a:ext>
           </a:extLst>
         </p:spPr>
@@ -16983,7 +16466,7 @@
           </a:ln>
           <a:extLst>
             <a:ext uri="{C572A759-6A51-4108-AA02-DFA0A04FC94B}">
-              <ma14:wrappingTextBoxFlag xmlns:ma14="http://schemas.microsoft.com/office/mac/drawingml/2011/main" xmlns:a14="http://schemas.microsoft.com/office/drawing/2010/main" xmlns:m="http://schemas.openxmlformats.org/officeDocument/2006/math" xmlns="" val="1"/>
+              <ma14:wrappingTextBoxFlag xmlns="" xmlns:m="http://schemas.openxmlformats.org/officeDocument/2006/math" xmlns:a14="http://schemas.microsoft.com/office/drawing/2010/main" xmlns:ma14="http://schemas.microsoft.com/office/mac/drawingml/2011/main" val="1"/>
             </a:ext>
           </a:extLst>
         </p:spPr>
@@ -17051,7 +16534,7 @@
           </a:ln>
           <a:extLst>
             <a:ext uri="{C572A759-6A51-4108-AA02-DFA0A04FC94B}">
-              <ma14:wrappingTextBoxFlag xmlns:m="http://schemas.openxmlformats.org/officeDocument/2006/math" xmlns:a14="http://schemas.microsoft.com/office/drawing/2010/main" xmlns:ma14="http://schemas.microsoft.com/office/mac/drawingml/2011/main" xmlns="" val="1"/>
+              <ma14:wrappingTextBoxFlag xmlns="" xmlns:ma14="http://schemas.microsoft.com/office/mac/drawingml/2011/main" xmlns:a14="http://schemas.microsoft.com/office/drawing/2010/main" xmlns:m="http://schemas.openxmlformats.org/officeDocument/2006/math" val="1"/>
             </a:ext>
           </a:extLst>
         </p:spPr>
@@ -17323,7 +16806,7 @@
           </a:solidFill>
           <a:extLst>
             <a:ext uri="{C572A759-6A51-4108-AA02-DFA0A04FC94B}">
-              <ma14:wrappingTextBoxFlag xmlns:m="http://schemas.openxmlformats.org/officeDocument/2006/math" xmlns:a14="http://schemas.microsoft.com/office/drawing/2010/main" xmlns:ma14="http://schemas.microsoft.com/office/mac/drawingml/2011/main" xmlns="" val="1"/>
+              <ma14:wrappingTextBoxFlag xmlns="" xmlns:ma14="http://schemas.microsoft.com/office/mac/drawingml/2011/main" xmlns:a14="http://schemas.microsoft.com/office/drawing/2010/main" xmlns:m="http://schemas.openxmlformats.org/officeDocument/2006/math" val="1"/>
             </a:ext>
           </a:extLst>
         </p:spPr>
@@ -17405,7 +16888,7 @@
           </a:ln>
           <a:extLst>
             <a:ext uri="{C572A759-6A51-4108-AA02-DFA0A04FC94B}">
-              <ma14:wrappingTextBoxFlag xmlns:ma14="http://schemas.microsoft.com/office/mac/drawingml/2011/main" xmlns:a14="http://schemas.microsoft.com/office/drawing/2010/main" xmlns:m="http://schemas.openxmlformats.org/officeDocument/2006/math" xmlns="" val="1"/>
+              <ma14:wrappingTextBoxFlag xmlns="" xmlns:m="http://schemas.openxmlformats.org/officeDocument/2006/math" xmlns:a14="http://schemas.microsoft.com/office/drawing/2010/main" xmlns:ma14="http://schemas.microsoft.com/office/mac/drawingml/2011/main" val="1"/>
             </a:ext>
           </a:extLst>
         </p:spPr>
@@ -17473,7 +16956,7 @@
           </a:ln>
           <a:extLst>
             <a:ext uri="{C572A759-6A51-4108-AA02-DFA0A04FC94B}">
-              <ma14:wrappingTextBoxFlag xmlns:m="http://schemas.openxmlformats.org/officeDocument/2006/math" xmlns:a14="http://schemas.microsoft.com/office/drawing/2010/main" xmlns:ma14="http://schemas.microsoft.com/office/mac/drawingml/2011/main" xmlns="" val="1"/>
+              <ma14:wrappingTextBoxFlag xmlns="" xmlns:ma14="http://schemas.microsoft.com/office/mac/drawingml/2011/main" xmlns:a14="http://schemas.microsoft.com/office/drawing/2010/main" xmlns:m="http://schemas.openxmlformats.org/officeDocument/2006/math" val="1"/>
             </a:ext>
           </a:extLst>
         </p:spPr>
@@ -17740,7 +17223,7 @@
           </a:solidFill>
           <a:extLst>
             <a:ext uri="{C572A759-6A51-4108-AA02-DFA0A04FC94B}">
-              <ma14:wrappingTextBoxFlag xmlns:m="http://schemas.openxmlformats.org/officeDocument/2006/math" xmlns:a14="http://schemas.microsoft.com/office/drawing/2010/main" xmlns:ma14="http://schemas.microsoft.com/office/mac/drawingml/2011/main" xmlns="" val="1"/>
+              <ma14:wrappingTextBoxFlag xmlns="" xmlns:ma14="http://schemas.microsoft.com/office/mac/drawingml/2011/main" xmlns:a14="http://schemas.microsoft.com/office/drawing/2010/main" xmlns:m="http://schemas.openxmlformats.org/officeDocument/2006/math" val="1"/>
             </a:ext>
           </a:extLst>
         </p:spPr>
@@ -17822,7 +17305,7 @@
           </a:ln>
           <a:extLst>
             <a:ext uri="{C572A759-6A51-4108-AA02-DFA0A04FC94B}">
-              <ma14:wrappingTextBoxFlag xmlns:ma14="http://schemas.microsoft.com/office/mac/drawingml/2011/main" xmlns:a14="http://schemas.microsoft.com/office/drawing/2010/main" xmlns:m="http://schemas.openxmlformats.org/officeDocument/2006/math" xmlns="" val="1"/>
+              <ma14:wrappingTextBoxFlag xmlns="" xmlns:m="http://schemas.openxmlformats.org/officeDocument/2006/math" xmlns:a14="http://schemas.microsoft.com/office/drawing/2010/main" xmlns:ma14="http://schemas.microsoft.com/office/mac/drawingml/2011/main" val="1"/>
             </a:ext>
           </a:extLst>
         </p:spPr>
@@ -17890,7 +17373,7 @@
           </a:ln>
           <a:extLst>
             <a:ext uri="{C572A759-6A51-4108-AA02-DFA0A04FC94B}">
-              <ma14:wrappingTextBoxFlag xmlns:m="http://schemas.openxmlformats.org/officeDocument/2006/math" xmlns:a14="http://schemas.microsoft.com/office/drawing/2010/main" xmlns:ma14="http://schemas.microsoft.com/office/mac/drawingml/2011/main" xmlns="" val="1"/>
+              <ma14:wrappingTextBoxFlag xmlns="" xmlns:ma14="http://schemas.microsoft.com/office/mac/drawingml/2011/main" xmlns:a14="http://schemas.microsoft.com/office/drawing/2010/main" xmlns:m="http://schemas.openxmlformats.org/officeDocument/2006/math" val="1"/>
             </a:ext>
           </a:extLst>
         </p:spPr>
@@ -18144,7 +17627,7 @@
           </a:solidFill>
           <a:extLst>
             <a:ext uri="{C572A759-6A51-4108-AA02-DFA0A04FC94B}">
-              <ma14:wrappingTextBoxFlag xmlns:m="http://schemas.openxmlformats.org/officeDocument/2006/math" xmlns:a14="http://schemas.microsoft.com/office/drawing/2010/main" xmlns:ma14="http://schemas.microsoft.com/office/mac/drawingml/2011/main" xmlns="" val="1"/>
+              <ma14:wrappingTextBoxFlag xmlns="" xmlns:ma14="http://schemas.microsoft.com/office/mac/drawingml/2011/main" xmlns:a14="http://schemas.microsoft.com/office/drawing/2010/main" xmlns:m="http://schemas.openxmlformats.org/officeDocument/2006/math" val="1"/>
             </a:ext>
           </a:extLst>
         </p:spPr>
@@ -18226,7 +17709,7 @@
           </a:ln>
           <a:extLst>
             <a:ext uri="{C572A759-6A51-4108-AA02-DFA0A04FC94B}">
-              <ma14:wrappingTextBoxFlag xmlns:ma14="http://schemas.microsoft.com/office/mac/drawingml/2011/main" xmlns:a14="http://schemas.microsoft.com/office/drawing/2010/main" xmlns:m="http://schemas.openxmlformats.org/officeDocument/2006/math" xmlns="" val="1"/>
+              <ma14:wrappingTextBoxFlag xmlns="" xmlns:m="http://schemas.openxmlformats.org/officeDocument/2006/math" xmlns:a14="http://schemas.microsoft.com/office/drawing/2010/main" xmlns:ma14="http://schemas.microsoft.com/office/mac/drawingml/2011/main" val="1"/>
             </a:ext>
           </a:extLst>
         </p:spPr>
@@ -18294,7 +17777,7 @@
           </a:ln>
           <a:extLst>
             <a:ext uri="{C572A759-6A51-4108-AA02-DFA0A04FC94B}">
-              <ma14:wrappingTextBoxFlag xmlns:m="http://schemas.openxmlformats.org/officeDocument/2006/math" xmlns:a14="http://schemas.microsoft.com/office/drawing/2010/main" xmlns:ma14="http://schemas.microsoft.com/office/mac/drawingml/2011/main" xmlns="" val="1"/>
+              <ma14:wrappingTextBoxFlag xmlns="" xmlns:ma14="http://schemas.microsoft.com/office/mac/drawingml/2011/main" xmlns:a14="http://schemas.microsoft.com/office/drawing/2010/main" xmlns:m="http://schemas.openxmlformats.org/officeDocument/2006/math" val="1"/>
             </a:ext>
           </a:extLst>
         </p:spPr>
@@ -18548,7 +18031,7 @@
           </a:solidFill>
           <a:extLst>
             <a:ext uri="{C572A759-6A51-4108-AA02-DFA0A04FC94B}">
-              <ma14:wrappingTextBoxFlag xmlns:m="http://schemas.openxmlformats.org/officeDocument/2006/math" xmlns:a14="http://schemas.microsoft.com/office/drawing/2010/main" xmlns:ma14="http://schemas.microsoft.com/office/mac/drawingml/2011/main" xmlns="" val="1"/>
+              <ma14:wrappingTextBoxFlag xmlns="" xmlns:ma14="http://schemas.microsoft.com/office/mac/drawingml/2011/main" xmlns:a14="http://schemas.microsoft.com/office/drawing/2010/main" xmlns:m="http://schemas.openxmlformats.org/officeDocument/2006/math" val="1"/>
             </a:ext>
           </a:extLst>
         </p:spPr>
@@ -18630,7 +18113,7 @@
           </a:ln>
           <a:extLst>
             <a:ext uri="{C572A759-6A51-4108-AA02-DFA0A04FC94B}">
-              <ma14:wrappingTextBoxFlag xmlns:ma14="http://schemas.microsoft.com/office/mac/drawingml/2011/main" xmlns:a14="http://schemas.microsoft.com/office/drawing/2010/main" xmlns:m="http://schemas.openxmlformats.org/officeDocument/2006/math" xmlns="" val="1"/>
+              <ma14:wrappingTextBoxFlag xmlns="" xmlns:m="http://schemas.openxmlformats.org/officeDocument/2006/math" xmlns:a14="http://schemas.microsoft.com/office/drawing/2010/main" xmlns:ma14="http://schemas.microsoft.com/office/mac/drawingml/2011/main" val="1"/>
             </a:ext>
           </a:extLst>
         </p:spPr>
@@ -18692,7 +18175,7 @@
           </a:ln>
           <a:extLst>
             <a:ext uri="{C572A759-6A51-4108-AA02-DFA0A04FC94B}">
-              <ma14:wrappingTextBoxFlag xmlns:m="http://schemas.openxmlformats.org/officeDocument/2006/math" xmlns:a14="http://schemas.microsoft.com/office/drawing/2010/main" xmlns:ma14="http://schemas.microsoft.com/office/mac/drawingml/2011/main" xmlns="" val="1"/>
+              <ma14:wrappingTextBoxFlag xmlns="" xmlns:ma14="http://schemas.microsoft.com/office/mac/drawingml/2011/main" xmlns:a14="http://schemas.microsoft.com/office/drawing/2010/main" xmlns:m="http://schemas.openxmlformats.org/officeDocument/2006/math" val="1"/>
             </a:ext>
           </a:extLst>
         </p:spPr>
@@ -19036,7 +18519,7 @@
           </a:solidFill>
           <a:extLst>
             <a:ext uri="{C572A759-6A51-4108-AA02-DFA0A04FC94B}">
-              <ma14:wrappingTextBoxFlag xmlns="" xmlns:ma14="http://schemas.microsoft.com/office/mac/drawingml/2011/main" xmlns:a14="http://schemas.microsoft.com/office/drawing/2010/main" xmlns:m="http://schemas.openxmlformats.org/officeDocument/2006/math" val="1"/>
+              <ma14:wrappingTextBoxFlag xmlns:m="http://schemas.openxmlformats.org/officeDocument/2006/math" xmlns:a14="http://schemas.microsoft.com/office/drawing/2010/main" xmlns:ma14="http://schemas.microsoft.com/office/mac/drawingml/2011/main" xmlns="" val="1"/>
             </a:ext>
           </a:extLst>
         </p:spPr>
@@ -19254,7 +18737,7 @@
           <a:effectLst/>
           <a:extLst>
             <a:ext uri="{C572A759-6A51-4108-AA02-DFA0A04FC94B}">
-              <ma14:wrappingTextBoxFlag xmlns:m="http://schemas.openxmlformats.org/officeDocument/2006/math" xmlns:a14="http://schemas.microsoft.com/office/drawing/2010/main" xmlns:ma14="http://schemas.microsoft.com/office/mac/drawingml/2011/main" xmlns="" val="1"/>
+              <ma14:wrappingTextBoxFlag xmlns="" xmlns:ma14="http://schemas.microsoft.com/office/mac/drawingml/2011/main" xmlns:a14="http://schemas.microsoft.com/office/drawing/2010/main" xmlns:m="http://schemas.openxmlformats.org/officeDocument/2006/math" val="1"/>
             </a:ext>
           </a:extLst>
         </p:spPr>
@@ -19372,7 +18855,7 @@
           <a:effectLst/>
           <a:extLst>
             <a:ext uri="{C572A759-6A51-4108-AA02-DFA0A04FC94B}">
-              <ma14:wrappingTextBoxFlag xmlns:m="http://schemas.openxmlformats.org/officeDocument/2006/math" xmlns:a14="http://schemas.microsoft.com/office/drawing/2010/main" xmlns:ma14="http://schemas.microsoft.com/office/mac/drawingml/2011/main" xmlns="" val="1"/>
+              <ma14:wrappingTextBoxFlag xmlns="" xmlns:ma14="http://schemas.microsoft.com/office/mac/drawingml/2011/main" xmlns:a14="http://schemas.microsoft.com/office/drawing/2010/main" xmlns:m="http://schemas.openxmlformats.org/officeDocument/2006/math" val="1"/>
             </a:ext>
           </a:extLst>
         </p:spPr>
@@ -19514,7 +18997,7 @@
           <a:effectLst/>
           <a:extLst>
             <a:ext uri="{C572A759-6A51-4108-AA02-DFA0A04FC94B}">
-              <ma14:wrappingTextBoxFlag xmlns:m="http://schemas.openxmlformats.org/officeDocument/2006/math" xmlns:a14="http://schemas.microsoft.com/office/drawing/2010/main" xmlns:ma14="http://schemas.microsoft.com/office/mac/drawingml/2011/main" xmlns="" val="1"/>
+              <ma14:wrappingTextBoxFlag xmlns="" xmlns:ma14="http://schemas.microsoft.com/office/mac/drawingml/2011/main" xmlns:a14="http://schemas.microsoft.com/office/drawing/2010/main" xmlns:m="http://schemas.openxmlformats.org/officeDocument/2006/math" val="1"/>
             </a:ext>
           </a:extLst>
         </p:spPr>
@@ -20243,7 +19726,7 @@
           </a:solidFill>
           <a:extLst>
             <a:ext uri="{C572A759-6A51-4108-AA02-DFA0A04FC94B}">
-              <ma14:wrappingTextBoxFlag xmlns:m="http://schemas.openxmlformats.org/officeDocument/2006/math" xmlns:a14="http://schemas.microsoft.com/office/drawing/2010/main" xmlns:ma14="http://schemas.microsoft.com/office/mac/drawingml/2011/main" xmlns="" val="1"/>
+              <ma14:wrappingTextBoxFlag xmlns="" xmlns:ma14="http://schemas.microsoft.com/office/mac/drawingml/2011/main" xmlns:a14="http://schemas.microsoft.com/office/drawing/2010/main" xmlns:m="http://schemas.openxmlformats.org/officeDocument/2006/math" val="1"/>
             </a:ext>
           </a:extLst>
         </p:spPr>
@@ -20284,7 +19767,7 @@
           </a:ln>
           <a:extLst>
             <a:ext uri="{C572A759-6A51-4108-AA02-DFA0A04FC94B}">
-              <ma14:wrappingTextBoxFlag xmlns:ma14="http://schemas.microsoft.com/office/mac/drawingml/2011/main" xmlns:a14="http://schemas.microsoft.com/office/drawing/2010/main" xmlns:m="http://schemas.openxmlformats.org/officeDocument/2006/math" xmlns="" val="1"/>
+              <ma14:wrappingTextBoxFlag xmlns="" xmlns:m="http://schemas.openxmlformats.org/officeDocument/2006/math" xmlns:a14="http://schemas.microsoft.com/office/drawing/2010/main" xmlns:ma14="http://schemas.microsoft.com/office/mac/drawingml/2011/main" val="1"/>
             </a:ext>
           </a:extLst>
         </p:spPr>
@@ -20343,7 +19826,7 @@
           </a:ln>
           <a:extLst>
             <a:ext uri="{C572A759-6A51-4108-AA02-DFA0A04FC94B}">
-              <ma14:wrappingTextBoxFlag xmlns="" xmlns:m="http://schemas.openxmlformats.org/officeDocument/2006/math" xmlns:a14="http://schemas.microsoft.com/office/drawing/2010/main" xmlns:ma14="http://schemas.microsoft.com/office/mac/drawingml/2011/main" val="1"/>
+              <ma14:wrappingTextBoxFlag xmlns:ma14="http://schemas.microsoft.com/office/mac/drawingml/2011/main" xmlns:a14="http://schemas.microsoft.com/office/drawing/2010/main" xmlns:m="http://schemas.openxmlformats.org/officeDocument/2006/math" xmlns="" val="1"/>
             </a:ext>
           </a:extLst>
         </p:spPr>
@@ -21219,7 +20702,7 @@
           </a:solidFill>
           <a:extLst>
             <a:ext uri="{C572A759-6A51-4108-AA02-DFA0A04FC94B}">
-              <ma14:wrappingTextBoxFlag xmlns:m="http://schemas.openxmlformats.org/officeDocument/2006/math" xmlns:a14="http://schemas.microsoft.com/office/drawing/2010/main" xmlns:ma14="http://schemas.microsoft.com/office/mac/drawingml/2011/main" xmlns="" val="1"/>
+              <ma14:wrappingTextBoxFlag xmlns="" xmlns:ma14="http://schemas.microsoft.com/office/mac/drawingml/2011/main" xmlns:a14="http://schemas.microsoft.com/office/drawing/2010/main" xmlns:m="http://schemas.openxmlformats.org/officeDocument/2006/math" val="1"/>
             </a:ext>
           </a:extLst>
         </p:spPr>
@@ -21260,7 +20743,7 @@
           </a:ln>
           <a:extLst>
             <a:ext uri="{C572A759-6A51-4108-AA02-DFA0A04FC94B}">
-              <ma14:wrappingTextBoxFlag xmlns:ma14="http://schemas.microsoft.com/office/mac/drawingml/2011/main" xmlns:a14="http://schemas.microsoft.com/office/drawing/2010/main" xmlns:m="http://schemas.openxmlformats.org/officeDocument/2006/math" xmlns="" val="1"/>
+              <ma14:wrappingTextBoxFlag xmlns="" xmlns:m="http://schemas.openxmlformats.org/officeDocument/2006/math" xmlns:a14="http://schemas.microsoft.com/office/drawing/2010/main" xmlns:ma14="http://schemas.microsoft.com/office/mac/drawingml/2011/main" val="1"/>
             </a:ext>
           </a:extLst>
         </p:spPr>
@@ -21322,7 +20805,7 @@
           </a:ln>
           <a:extLst>
             <a:ext uri="{C572A759-6A51-4108-AA02-DFA0A04FC94B}">
-              <ma14:wrappingTextBoxFlag xmlns="" xmlns:m="http://schemas.openxmlformats.org/officeDocument/2006/math" xmlns:a14="http://schemas.microsoft.com/office/drawing/2010/main" xmlns:ma14="http://schemas.microsoft.com/office/mac/drawingml/2011/main" val="1"/>
+              <ma14:wrappingTextBoxFlag xmlns:ma14="http://schemas.microsoft.com/office/mac/drawingml/2011/main" xmlns:a14="http://schemas.microsoft.com/office/drawing/2010/main" xmlns:m="http://schemas.openxmlformats.org/officeDocument/2006/math" xmlns="" val="1"/>
             </a:ext>
           </a:extLst>
         </p:spPr>
@@ -21570,7 +21053,7 @@
           </a:solidFill>
           <a:extLst>
             <a:ext uri="{C572A759-6A51-4108-AA02-DFA0A04FC94B}">
-              <ma14:wrappingTextBoxFlag xmlns:m="http://schemas.openxmlformats.org/officeDocument/2006/math" xmlns:a14="http://schemas.microsoft.com/office/drawing/2010/main" xmlns:ma14="http://schemas.microsoft.com/office/mac/drawingml/2011/main" xmlns="" val="1"/>
+              <ma14:wrappingTextBoxFlag xmlns="" xmlns:ma14="http://schemas.microsoft.com/office/mac/drawingml/2011/main" xmlns:a14="http://schemas.microsoft.com/office/drawing/2010/main" xmlns:m="http://schemas.openxmlformats.org/officeDocument/2006/math" val="1"/>
             </a:ext>
           </a:extLst>
         </p:spPr>
@@ -21611,7 +21094,7 @@
           </a:ln>
           <a:extLst>
             <a:ext uri="{C572A759-6A51-4108-AA02-DFA0A04FC94B}">
-              <ma14:wrappingTextBoxFlag xmlns:ma14="http://schemas.microsoft.com/office/mac/drawingml/2011/main" xmlns:a14="http://schemas.microsoft.com/office/drawing/2010/main" xmlns:m="http://schemas.openxmlformats.org/officeDocument/2006/math" xmlns="" val="1"/>
+              <ma14:wrappingTextBoxFlag xmlns="" xmlns:m="http://schemas.openxmlformats.org/officeDocument/2006/math" xmlns:a14="http://schemas.microsoft.com/office/drawing/2010/main" xmlns:ma14="http://schemas.microsoft.com/office/mac/drawingml/2011/main" val="1"/>
             </a:ext>
           </a:extLst>
         </p:spPr>
@@ -21673,7 +21156,7 @@
           </a:ln>
           <a:extLst>
             <a:ext uri="{C572A759-6A51-4108-AA02-DFA0A04FC94B}">
-              <ma14:wrappingTextBoxFlag xmlns="" xmlns:m="http://schemas.openxmlformats.org/officeDocument/2006/math" xmlns:a14="http://schemas.microsoft.com/office/drawing/2010/main" xmlns:ma14="http://schemas.microsoft.com/office/mac/drawingml/2011/main" val="1"/>
+              <ma14:wrappingTextBoxFlag xmlns:ma14="http://schemas.microsoft.com/office/mac/drawingml/2011/main" xmlns:a14="http://schemas.microsoft.com/office/drawing/2010/main" xmlns:m="http://schemas.openxmlformats.org/officeDocument/2006/math" xmlns="" val="1"/>
             </a:ext>
           </a:extLst>
         </p:spPr>
@@ -22193,7 +21676,7 @@
           </a:solidFill>
           <a:extLst>
             <a:ext uri="{C572A759-6A51-4108-AA02-DFA0A04FC94B}">
-              <ma14:wrappingTextBoxFlag xmlns="" xmlns:ma14="http://schemas.microsoft.com/office/mac/drawingml/2011/main" xmlns:a14="http://schemas.microsoft.com/office/drawing/2010/main" xmlns:m="http://schemas.openxmlformats.org/officeDocument/2006/math" val="1"/>
+              <ma14:wrappingTextBoxFlag xmlns:m="http://schemas.openxmlformats.org/officeDocument/2006/math" xmlns:a14="http://schemas.microsoft.com/office/drawing/2010/main" xmlns:ma14="http://schemas.microsoft.com/office/mac/drawingml/2011/main" xmlns="" val="1"/>
             </a:ext>
           </a:extLst>
         </p:spPr>
@@ -22234,7 +21717,7 @@
           </a:ln>
           <a:extLst>
             <a:ext uri="{C572A759-6A51-4108-AA02-DFA0A04FC94B}">
-              <ma14:wrappingTextBoxFlag xmlns="" xmlns:m="http://schemas.openxmlformats.org/officeDocument/2006/math" xmlns:a14="http://schemas.microsoft.com/office/drawing/2010/main" xmlns:ma14="http://schemas.microsoft.com/office/mac/drawingml/2011/main" val="1"/>
+              <ma14:wrappingTextBoxFlag xmlns:ma14="http://schemas.microsoft.com/office/mac/drawingml/2011/main" xmlns:a14="http://schemas.microsoft.com/office/drawing/2010/main" xmlns:m="http://schemas.openxmlformats.org/officeDocument/2006/math" xmlns="" val="1"/>
             </a:ext>
           </a:extLst>
         </p:spPr>
@@ -22286,13 +21769,13 @@
           <p:nvPr/>
         </p:nvPicPr>
         <p:blipFill>
-          <a:blip r:embed="rId3">
+          <a:blip>
             <a:extLst>
               <a:ext uri="{28A0092B-C50C-407E-A947-70E740481C1C}">
                 <a14:useLocalDpi xmlns:a14="http://schemas.microsoft.com/office/drawing/2010/main"/>
               </a:ext>
               <a:ext uri="{96DAC541-7B7A-43D3-8B79-37D633B846F1}">
-                <asvg:svgBlip xmlns:asvg="http://schemas.microsoft.com/office/drawing/2016/SVG/main" r:embed="rId4"/>
+                <asvg:svgBlip xmlns:asvg="http://schemas.microsoft.com/office/drawing/2016/SVG/main" r:embed="rId3"/>
               </a:ext>
             </a:extLst>
           </a:blip>
@@ -22328,7 +21811,7 @@
           <p:nvPr/>
         </p:nvPicPr>
         <p:blipFill>
-          <a:blip r:embed="rId5"/>
+          <a:blip r:embed="rId4"/>
           <a:stretch>
             <a:fillRect/>
           </a:stretch>
@@ -22358,7 +21841,7 @@
           <p:nvPr/>
         </p:nvPicPr>
         <p:blipFill>
-          <a:blip r:embed="rId6"/>
+          <a:blip r:embed="rId5"/>
           <a:stretch>
             <a:fillRect/>
           </a:stretch>
@@ -22398,7 +21881,7 @@
           </a:ln>
           <a:extLst>
             <a:ext uri="{C572A759-6A51-4108-AA02-DFA0A04FC94B}">
-              <ma14:wrappingTextBoxFlag xmlns="" xmlns:m="http://schemas.openxmlformats.org/officeDocument/2006/math" xmlns:a14="http://schemas.microsoft.com/office/drawing/2010/main" xmlns:ma14="http://schemas.microsoft.com/office/mac/drawingml/2011/main" val="1"/>
+              <ma14:wrappingTextBoxFlag xmlns:ma14="http://schemas.microsoft.com/office/mac/drawingml/2011/main" xmlns:a14="http://schemas.microsoft.com/office/drawing/2010/main" xmlns:m="http://schemas.openxmlformats.org/officeDocument/2006/math" xmlns="" val="1"/>
             </a:ext>
           </a:extLst>
         </p:spPr>
@@ -22452,7 +21935,7 @@
           </a:ln>
           <a:extLst>
             <a:ext uri="{C572A759-6A51-4108-AA02-DFA0A04FC94B}">
-              <ma14:wrappingTextBoxFlag xmlns="" xmlns:m="http://schemas.openxmlformats.org/officeDocument/2006/math" xmlns:a14="http://schemas.microsoft.com/office/drawing/2010/main" xmlns:ma14="http://schemas.microsoft.com/office/mac/drawingml/2011/main" val="1"/>
+              <ma14:wrappingTextBoxFlag xmlns:ma14="http://schemas.microsoft.com/office/mac/drawingml/2011/main" xmlns:a14="http://schemas.microsoft.com/office/drawing/2010/main" xmlns:m="http://schemas.openxmlformats.org/officeDocument/2006/math" xmlns="" val="1"/>
             </a:ext>
           </a:extLst>
         </p:spPr>
@@ -22555,7 +22038,7 @@
           </a:prstGeom>
           <a:extLst>
             <a:ext uri="{C572A759-6A51-4108-AA02-DFA0A04FC94B}">
-              <ma14:wrappingTextBoxFlag xmlns:m="http://schemas.openxmlformats.org/officeDocument/2006/math" xmlns:a14="http://schemas.microsoft.com/office/drawing/2010/main" xmlns:ma14="http://schemas.microsoft.com/office/mac/drawingml/2011/main" xmlns="" val="1"/>
+              <ma14:wrappingTextBoxFlag xmlns="" xmlns:ma14="http://schemas.microsoft.com/office/mac/drawingml/2011/main" xmlns:a14="http://schemas.microsoft.com/office/drawing/2010/main" xmlns:m="http://schemas.openxmlformats.org/officeDocument/2006/math" val="1"/>
             </a:ext>
           </a:extLst>
         </p:spPr>
@@ -22590,7 +22073,7 @@
           </a:ln>
           <a:extLst>
             <a:ext uri="{C572A759-6A51-4108-AA02-DFA0A04FC94B}">
-              <ma14:wrappingTextBoxFlag xmlns:m="http://schemas.openxmlformats.org/officeDocument/2006/math" xmlns:a14="http://schemas.microsoft.com/office/drawing/2010/main" xmlns:ma14="http://schemas.microsoft.com/office/mac/drawingml/2011/main" xmlns="" val="1"/>
+              <ma14:wrappingTextBoxFlag xmlns="" xmlns:ma14="http://schemas.microsoft.com/office/mac/drawingml/2011/main" xmlns:a14="http://schemas.microsoft.com/office/drawing/2010/main" xmlns:m="http://schemas.openxmlformats.org/officeDocument/2006/math" val="1"/>
             </a:ext>
           </a:extLst>
         </p:spPr>
@@ -22795,7 +22278,7 @@
           </a:solidFill>
           <a:extLst>
             <a:ext uri="{C572A759-6A51-4108-AA02-DFA0A04FC94B}">
-              <ma14:wrappingTextBoxFlag xmlns="" xmlns:ma14="http://schemas.microsoft.com/office/mac/drawingml/2011/main" xmlns:a14="http://schemas.microsoft.com/office/drawing/2010/main" xmlns:m="http://schemas.openxmlformats.org/officeDocument/2006/math" val="1"/>
+              <ma14:wrappingTextBoxFlag xmlns:m="http://schemas.openxmlformats.org/officeDocument/2006/math" xmlns:a14="http://schemas.microsoft.com/office/drawing/2010/main" xmlns:ma14="http://schemas.microsoft.com/office/mac/drawingml/2011/main" xmlns="" val="1"/>
             </a:ext>
           </a:extLst>
         </p:spPr>
@@ -22869,7 +22352,7 @@
           </a:ln>
           <a:extLst>
             <a:ext uri="{C572A759-6A51-4108-AA02-DFA0A04FC94B}">
-              <ma14:wrappingTextBoxFlag xmlns="" xmlns:m="http://schemas.openxmlformats.org/officeDocument/2006/math" xmlns:a14="http://schemas.microsoft.com/office/drawing/2010/main" xmlns:ma14="http://schemas.microsoft.com/office/mac/drawingml/2011/main" val="1"/>
+              <ma14:wrappingTextBoxFlag xmlns:ma14="http://schemas.microsoft.com/office/mac/drawingml/2011/main" xmlns:a14="http://schemas.microsoft.com/office/drawing/2010/main" xmlns:m="http://schemas.openxmlformats.org/officeDocument/2006/math" xmlns="" val="1"/>
             </a:ext>
           </a:extLst>
         </p:spPr>
@@ -22931,7 +22414,7 @@
           </a:ln>
           <a:extLst>
             <a:ext uri="{C572A759-6A51-4108-AA02-DFA0A04FC94B}">
-              <ma14:wrappingTextBoxFlag xmlns="" xmlns:m="http://schemas.openxmlformats.org/officeDocument/2006/math" xmlns:a14="http://schemas.microsoft.com/office/drawing/2010/main" xmlns:ma14="http://schemas.microsoft.com/office/mac/drawingml/2011/main" val="1"/>
+              <ma14:wrappingTextBoxFlag xmlns:ma14="http://schemas.microsoft.com/office/mac/drawingml/2011/main" xmlns:a14="http://schemas.microsoft.com/office/drawing/2010/main" xmlns:m="http://schemas.openxmlformats.org/officeDocument/2006/math" xmlns="" val="1"/>
             </a:ext>
           </a:extLst>
         </p:spPr>
@@ -23227,7 +22710,7 @@
           </a:solidFill>
           <a:extLst>
             <a:ext uri="{C572A759-6A51-4108-AA02-DFA0A04FC94B}">
-              <ma14:wrappingTextBoxFlag xmlns="" xmlns:ma14="http://schemas.microsoft.com/office/mac/drawingml/2011/main" xmlns:a14="http://schemas.microsoft.com/office/drawing/2010/main" xmlns:m="http://schemas.openxmlformats.org/officeDocument/2006/math" val="1"/>
+              <ma14:wrappingTextBoxFlag xmlns:m="http://schemas.openxmlformats.org/officeDocument/2006/math" xmlns:a14="http://schemas.microsoft.com/office/drawing/2010/main" xmlns:ma14="http://schemas.microsoft.com/office/mac/drawingml/2011/main" xmlns="" val="1"/>
             </a:ext>
           </a:extLst>
         </p:spPr>
@@ -23307,7 +22790,7 @@
           </a:ln>
           <a:extLst>
             <a:ext uri="{C572A759-6A51-4108-AA02-DFA0A04FC94B}">
-              <ma14:wrappingTextBoxFlag xmlns="" xmlns:m="http://schemas.openxmlformats.org/officeDocument/2006/math" xmlns:a14="http://schemas.microsoft.com/office/drawing/2010/main" xmlns:ma14="http://schemas.microsoft.com/office/mac/drawingml/2011/main" val="1"/>
+              <ma14:wrappingTextBoxFlag xmlns:ma14="http://schemas.microsoft.com/office/mac/drawingml/2011/main" xmlns:a14="http://schemas.microsoft.com/office/drawing/2010/main" xmlns:m="http://schemas.openxmlformats.org/officeDocument/2006/math" xmlns="" val="1"/>
             </a:ext>
           </a:extLst>
         </p:spPr>
@@ -23369,7 +22852,7 @@
           </a:ln>
           <a:extLst>
             <a:ext uri="{C572A759-6A51-4108-AA02-DFA0A04FC94B}">
-              <ma14:wrappingTextBoxFlag xmlns="" xmlns:m="http://schemas.openxmlformats.org/officeDocument/2006/math" xmlns:a14="http://schemas.microsoft.com/office/drawing/2010/main" xmlns:ma14="http://schemas.microsoft.com/office/mac/drawingml/2011/main" val="1"/>
+              <ma14:wrappingTextBoxFlag xmlns:ma14="http://schemas.microsoft.com/office/mac/drawingml/2011/main" xmlns:a14="http://schemas.microsoft.com/office/drawing/2010/main" xmlns:m="http://schemas.openxmlformats.org/officeDocument/2006/math" xmlns="" val="1"/>
             </a:ext>
           </a:extLst>
         </p:spPr>
@@ -23696,7 +23179,7 @@
           </a:solidFill>
           <a:extLst>
             <a:ext uri="{C572A759-6A51-4108-AA02-DFA0A04FC94B}">
-              <ma14:wrappingTextBoxFlag xmlns="" xmlns:ma14="http://schemas.microsoft.com/office/mac/drawingml/2011/main" xmlns:a14="http://schemas.microsoft.com/office/drawing/2010/main" xmlns:m="http://schemas.openxmlformats.org/officeDocument/2006/math" val="1"/>
+              <ma14:wrappingTextBoxFlag xmlns:m="http://schemas.openxmlformats.org/officeDocument/2006/math" xmlns:a14="http://schemas.microsoft.com/office/drawing/2010/main" xmlns:ma14="http://schemas.microsoft.com/office/mac/drawingml/2011/main" xmlns="" val="1"/>
             </a:ext>
           </a:extLst>
         </p:spPr>
@@ -23776,7 +23259,7 @@
           </a:ln>
           <a:extLst>
             <a:ext uri="{C572A759-6A51-4108-AA02-DFA0A04FC94B}">
-              <ma14:wrappingTextBoxFlag xmlns="" xmlns:m="http://schemas.openxmlformats.org/officeDocument/2006/math" xmlns:a14="http://schemas.microsoft.com/office/drawing/2010/main" xmlns:ma14="http://schemas.microsoft.com/office/mac/drawingml/2011/main" val="1"/>
+              <ma14:wrappingTextBoxFlag xmlns:ma14="http://schemas.microsoft.com/office/mac/drawingml/2011/main" xmlns:a14="http://schemas.microsoft.com/office/drawing/2010/main" xmlns:m="http://schemas.openxmlformats.org/officeDocument/2006/math" xmlns="" val="1"/>
             </a:ext>
           </a:extLst>
         </p:spPr>
@@ -23838,7 +23321,7 @@
           </a:ln>
           <a:extLst>
             <a:ext uri="{C572A759-6A51-4108-AA02-DFA0A04FC94B}">
-              <ma14:wrappingTextBoxFlag xmlns="" xmlns:m="http://schemas.openxmlformats.org/officeDocument/2006/math" xmlns:a14="http://schemas.microsoft.com/office/drawing/2010/main" xmlns:ma14="http://schemas.microsoft.com/office/mac/drawingml/2011/main" val="1"/>
+              <ma14:wrappingTextBoxFlag xmlns:ma14="http://schemas.microsoft.com/office/mac/drawingml/2011/main" xmlns:a14="http://schemas.microsoft.com/office/drawing/2010/main" xmlns:m="http://schemas.openxmlformats.org/officeDocument/2006/math" xmlns="" val="1"/>
             </a:ext>
           </a:extLst>
         </p:spPr>
@@ -24752,7 +24235,7 @@
           </a:solidFill>
           <a:extLst>
             <a:ext uri="{C572A759-6A51-4108-AA02-DFA0A04FC94B}">
-              <ma14:wrappingTextBoxFlag xmlns:m="http://schemas.openxmlformats.org/officeDocument/2006/math" xmlns:a14="http://schemas.microsoft.com/office/drawing/2010/main" xmlns:ma14="http://schemas.microsoft.com/office/mac/drawingml/2011/main" xmlns="" val="1"/>
+              <ma14:wrappingTextBoxFlag xmlns="" xmlns:ma14="http://schemas.microsoft.com/office/mac/drawingml/2011/main" xmlns:a14="http://schemas.microsoft.com/office/drawing/2010/main" xmlns:m="http://schemas.openxmlformats.org/officeDocument/2006/math" val="1"/>
             </a:ext>
           </a:extLst>
         </p:spPr>
@@ -24793,7 +24276,7 @@
           </a:ln>
           <a:extLst>
             <a:ext uri="{C572A759-6A51-4108-AA02-DFA0A04FC94B}">
-              <ma14:wrappingTextBoxFlag xmlns:m="http://schemas.openxmlformats.org/officeDocument/2006/math" xmlns:a14="http://schemas.microsoft.com/office/drawing/2010/main" xmlns:ma14="http://schemas.microsoft.com/office/mac/drawingml/2011/main" xmlns="" val="1"/>
+              <ma14:wrappingTextBoxFlag xmlns="" xmlns:ma14="http://schemas.microsoft.com/office/mac/drawingml/2011/main" xmlns:a14="http://schemas.microsoft.com/office/drawing/2010/main" xmlns:m="http://schemas.openxmlformats.org/officeDocument/2006/math" val="1"/>
             </a:ext>
           </a:extLst>
         </p:spPr>
@@ -24914,7 +24397,7 @@
           </a:ln>
           <a:extLst>
             <a:ext uri="{C572A759-6A51-4108-AA02-DFA0A04FC94B}">
-              <ma14:wrappingTextBoxFlag xmlns:ma14="http://schemas.microsoft.com/office/mac/drawingml/2011/main" xmlns:a14="http://schemas.microsoft.com/office/drawing/2010/main" xmlns:m="http://schemas.openxmlformats.org/officeDocument/2006/math" xmlns="" val="1"/>
+              <ma14:wrappingTextBoxFlag xmlns="" xmlns:m="http://schemas.openxmlformats.org/officeDocument/2006/math" xmlns:a14="http://schemas.microsoft.com/office/drawing/2010/main" xmlns:ma14="http://schemas.microsoft.com/office/mac/drawingml/2011/main" val="1"/>
             </a:ext>
           </a:extLst>
         </p:spPr>
@@ -24973,7 +24456,7 @@
           </a:ln>
           <a:extLst>
             <a:ext uri="{C572A759-6A51-4108-AA02-DFA0A04FC94B}">
-              <ma14:wrappingTextBoxFlag xmlns="" xmlns:ma14="http://schemas.microsoft.com/office/mac/drawingml/2011/main" xmlns:a14="http://schemas.microsoft.com/office/drawing/2010/main" xmlns:m="http://schemas.openxmlformats.org/officeDocument/2006/math" val="1"/>
+              <ma14:wrappingTextBoxFlag xmlns:m="http://schemas.openxmlformats.org/officeDocument/2006/math" xmlns:a14="http://schemas.microsoft.com/office/drawing/2010/main" xmlns:ma14="http://schemas.microsoft.com/office/mac/drawingml/2011/main" xmlns="" val="1"/>
             </a:ext>
           </a:extLst>
         </p:spPr>
@@ -25107,7 +24590,7 @@
           </a:ln>
           <a:extLst>
             <a:ext uri="{C572A759-6A51-4108-AA02-DFA0A04FC94B}">
-              <ma14:wrappingTextBoxFlag xmlns:m="http://schemas.openxmlformats.org/officeDocument/2006/math" xmlns:a14="http://schemas.microsoft.com/office/drawing/2010/main" xmlns:ma14="http://schemas.microsoft.com/office/mac/drawingml/2011/main" xmlns="" val="1"/>
+              <ma14:wrappingTextBoxFlag xmlns="" xmlns:ma14="http://schemas.microsoft.com/office/mac/drawingml/2011/main" xmlns:a14="http://schemas.microsoft.com/office/drawing/2010/main" xmlns:m="http://schemas.openxmlformats.org/officeDocument/2006/math" val="1"/>
             </a:ext>
           </a:extLst>
         </p:spPr>
@@ -25157,13 +24640,13 @@
           <p:nvPr/>
         </p:nvPicPr>
         <p:blipFill>
-          <a:blip r:embed="rId3">
+          <a:blip>
             <a:extLst>
               <a:ext uri="{28A0092B-C50C-407E-A947-70E740481C1C}">
                 <a14:useLocalDpi xmlns:a14="http://schemas.microsoft.com/office/drawing/2010/main"/>
               </a:ext>
               <a:ext uri="{96DAC541-7B7A-43D3-8B79-37D633B846F1}">
-                <asvg:svgBlip xmlns:asvg="http://schemas.microsoft.com/office/drawing/2016/SVG/main" r:embed="rId4"/>
+                <asvg:svgBlip xmlns:asvg="http://schemas.microsoft.com/office/drawing/2016/SVG/main" r:embed="rId3"/>
               </a:ext>
             </a:extLst>
           </a:blip>
@@ -25335,7 +24818,7 @@
           </a:solidFill>
           <a:extLst>
             <a:ext uri="{C572A759-6A51-4108-AA02-DFA0A04FC94B}">
-              <ma14:wrappingTextBoxFlag xmlns:m="http://schemas.openxmlformats.org/officeDocument/2006/math" xmlns:a14="http://schemas.microsoft.com/office/drawing/2010/main" xmlns:ma14="http://schemas.microsoft.com/office/mac/drawingml/2011/main" xmlns="" val="1"/>
+              <ma14:wrappingTextBoxFlag xmlns="" xmlns:ma14="http://schemas.microsoft.com/office/mac/drawingml/2011/main" xmlns:a14="http://schemas.microsoft.com/office/drawing/2010/main" xmlns:m="http://schemas.openxmlformats.org/officeDocument/2006/math" val="1"/>
             </a:ext>
           </a:extLst>
         </p:spPr>
@@ -25376,7 +24859,7 @@
           </a:ln>
           <a:extLst>
             <a:ext uri="{C572A759-6A51-4108-AA02-DFA0A04FC94B}">
-              <ma14:wrappingTextBoxFlag xmlns:m="http://schemas.openxmlformats.org/officeDocument/2006/math" xmlns:a14="http://schemas.microsoft.com/office/drawing/2010/main" xmlns:ma14="http://schemas.microsoft.com/office/mac/drawingml/2011/main" xmlns="" val="1"/>
+              <ma14:wrappingTextBoxFlag xmlns="" xmlns:ma14="http://schemas.microsoft.com/office/mac/drawingml/2011/main" xmlns:a14="http://schemas.microsoft.com/office/drawing/2010/main" xmlns:m="http://schemas.openxmlformats.org/officeDocument/2006/math" val="1"/>
             </a:ext>
           </a:extLst>
         </p:spPr>
@@ -25511,7 +24994,7 @@
           </a:ln>
           <a:extLst>
             <a:ext uri="{C572A759-6A51-4108-AA02-DFA0A04FC94B}">
-              <ma14:wrappingTextBoxFlag xmlns:m="http://schemas.openxmlformats.org/officeDocument/2006/math" xmlns:a14="http://schemas.microsoft.com/office/drawing/2010/main" xmlns:ma14="http://schemas.microsoft.com/office/mac/drawingml/2011/main" xmlns="" val="1"/>
+              <ma14:wrappingTextBoxFlag xmlns="" xmlns:ma14="http://schemas.microsoft.com/office/mac/drawingml/2011/main" xmlns:a14="http://schemas.microsoft.com/office/drawing/2010/main" xmlns:m="http://schemas.openxmlformats.org/officeDocument/2006/math" val="1"/>
             </a:ext>
           </a:extLst>
         </p:spPr>
@@ -25571,7 +25054,7 @@
           </a:ln>
           <a:extLst>
             <a:ext uri="{C572A759-6A51-4108-AA02-DFA0A04FC94B}">
-              <ma14:wrappingTextBoxFlag xmlns:ma14="http://schemas.microsoft.com/office/mac/drawingml/2011/main" xmlns:a14="http://schemas.microsoft.com/office/drawing/2010/main" xmlns:m="http://schemas.openxmlformats.org/officeDocument/2006/math" xmlns="" val="1"/>
+              <ma14:wrappingTextBoxFlag xmlns="" xmlns:m="http://schemas.openxmlformats.org/officeDocument/2006/math" xmlns:a14="http://schemas.microsoft.com/office/drawing/2010/main" xmlns:ma14="http://schemas.microsoft.com/office/mac/drawingml/2011/main" val="1"/>
             </a:ext>
           </a:extLst>
         </p:spPr>
@@ -25630,7 +25113,7 @@
           </a:ln>
           <a:extLst>
             <a:ext uri="{C572A759-6A51-4108-AA02-DFA0A04FC94B}">
-              <ma14:wrappingTextBoxFlag xmlns="" xmlns:ma14="http://schemas.microsoft.com/office/mac/drawingml/2011/main" xmlns:a14="http://schemas.microsoft.com/office/drawing/2010/main" xmlns:m="http://schemas.openxmlformats.org/officeDocument/2006/math" val="1"/>
+              <ma14:wrappingTextBoxFlag xmlns:m="http://schemas.openxmlformats.org/officeDocument/2006/math" xmlns:a14="http://schemas.microsoft.com/office/drawing/2010/main" xmlns:ma14="http://schemas.microsoft.com/office/mac/drawingml/2011/main" xmlns="" val="1"/>
             </a:ext>
           </a:extLst>
         </p:spPr>
@@ -25747,13 +25230,13 @@
           <p:nvPr/>
         </p:nvPicPr>
         <p:blipFill>
-          <a:blip r:embed="rId3">
+          <a:blip>
             <a:extLst>
               <a:ext uri="{28A0092B-C50C-407E-A947-70E740481C1C}">
                 <a14:useLocalDpi xmlns:a14="http://schemas.microsoft.com/office/drawing/2010/main"/>
               </a:ext>
               <a:ext uri="{96DAC541-7B7A-43D3-8B79-37D633B846F1}">
-                <asvg:svgBlip xmlns:asvg="http://schemas.microsoft.com/office/drawing/2016/SVG/main" r:embed="rId4"/>
+                <asvg:svgBlip xmlns:asvg="http://schemas.microsoft.com/office/drawing/2016/SVG/main" r:embed="rId3"/>
               </a:ext>
             </a:extLst>
           </a:blip>
@@ -28224,15 +27707,6 @@
 </file>
 
 <file path=customXml/item1.xml><?xml version="1.0" encoding="utf-8"?>
-<?mso-contentType ?>
-<FormTemplates xmlns="http://schemas.microsoft.com/sharepoint/v3/contenttype/forms">
-  <Display>DocumentLibraryForm</Display>
-  <Edit>DocumentLibraryForm</Edit>
-  <New>DocumentLibraryForm</New>
-</FormTemplates>
-</file>
-
-<file path=customXml/item2.xml><?xml version="1.0" encoding="utf-8"?>
 <p:properties xmlns:p="http://schemas.microsoft.com/office/2006/metadata/properties" xmlns:xsi="http://www.w3.org/2001/XMLSchema-instance" xmlns:pc="http://schemas.microsoft.com/office/infopath/2007/PartnerControls">
   <documentManagement>
     <lcf76f155ced4ddcb4097134ff3c332f xmlns="d2f16b87-0624-477d-ba0a-750d221ab23c">
@@ -28241,6 +27715,15 @@
     <TaxCatchAll xmlns="8168535b-5d60-42ad-a65e-bf2e941e3ec4" xsi:nil="true"/>
   </documentManagement>
 </p:properties>
+</file>
+
+<file path=customXml/item2.xml><?xml version="1.0" encoding="utf-8"?>
+<?mso-contentType ?>
+<FormTemplates xmlns="http://schemas.microsoft.com/sharepoint/v3/contenttype/forms">
+  <Display>DocumentLibraryForm</Display>
+  <Edit>DocumentLibraryForm</Edit>
+  <New>DocumentLibraryForm</New>
+</FormTemplates>
 </file>
 
 <file path=customXml/item3.xml><?xml version="1.0" encoding="utf-8"?>
@@ -28439,20 +27922,26 @@
 </file>
 
 <file path=customXml/itemProps1.xml><?xml version="1.0" encoding="utf-8"?>
-<ds:datastoreItem xmlns:ds="http://schemas.openxmlformats.org/officeDocument/2006/customXml" ds:itemID="{154546E5-6158-445B-86FA-D0CB17A6BF05}">
+<ds:datastoreItem xmlns:ds="http://schemas.openxmlformats.org/officeDocument/2006/customXml" ds:itemID="{2F3AC3B7-1DF3-4C6B-ACF9-D9E0163D9FAF}">
   <ds:schemaRefs>
-    <ds:schemaRef ds:uri="http://schemas.microsoft.com/sharepoint/v3/contenttype/forms"/>
+    <ds:schemaRef ds:uri="http://schemas.openxmlformats.org/package/2006/metadata/core-properties"/>
+    <ds:schemaRef ds:uri="http://schemas.microsoft.com/office/2006/documentManagement/types"/>
+    <ds:schemaRef ds:uri="8168535b-5d60-42ad-a65e-bf2e941e3ec4"/>
+    <ds:schemaRef ds:uri="http://purl.org/dc/terms/"/>
+    <ds:schemaRef ds:uri="d2f16b87-0624-477d-ba0a-750d221ab23c"/>
+    <ds:schemaRef ds:uri="http://www.w3.org/XML/1998/namespace"/>
+    <ds:schemaRef ds:uri="http://schemas.microsoft.com/office/infopath/2007/PartnerControls"/>
+    <ds:schemaRef ds:uri="http://schemas.microsoft.com/office/2006/metadata/properties"/>
+    <ds:schemaRef ds:uri="http://purl.org/dc/dcmitype/"/>
+    <ds:schemaRef ds:uri="http://purl.org/dc/elements/1.1/"/>
   </ds:schemaRefs>
 </ds:datastoreItem>
 </file>
 
 <file path=customXml/itemProps2.xml><?xml version="1.0" encoding="utf-8"?>
-<ds:datastoreItem xmlns:ds="http://schemas.openxmlformats.org/officeDocument/2006/customXml" ds:itemID="{2F3AC3B7-1DF3-4C6B-ACF9-D9E0163D9FAF}">
+<ds:datastoreItem xmlns:ds="http://schemas.openxmlformats.org/officeDocument/2006/customXml" ds:itemID="{154546E5-6158-445B-86FA-D0CB17A6BF05}">
   <ds:schemaRefs>
-    <ds:schemaRef ds:uri="http://schemas.microsoft.com/office/2006/metadata/properties"/>
-    <ds:schemaRef ds:uri="http://schemas.microsoft.com/office/infopath/2007/PartnerControls"/>
-    <ds:schemaRef ds:uri="d2f16b87-0624-477d-ba0a-750d221ab23c"/>
-    <ds:schemaRef ds:uri="8168535b-5d60-42ad-a65e-bf2e941e3ec4"/>
+    <ds:schemaRef ds:uri="http://schemas.microsoft.com/sharepoint/v3/contenttype/forms"/>
   </ds:schemaRefs>
 </ds:datastoreItem>
 </file>
@@ -28474,4 +27963,10 @@
     <ds:schemaRef ds:uri="http://schemas.microsoft.com/internal/obd"/>
   </ds:schemaRefs>
 </ds:datastoreItem>
+</file>
+
+<file path=docMetadata/LabelInfo.xml><?xml version="1.0" encoding="utf-8"?>
+<clbl:labelList xmlns:clbl="http://schemas.microsoft.com/office/2020/mipLabelMetadata">
+  <clbl:label id="{63de93b7-8949-4e3d-a08b-0d778f7f5cab}" enabled="1" method="Standard" siteId="{0b3fc178-b730-4e8b-9843-e81259237b77}" contentBits="0" removed="0"/>
+</clbl:labelList>
 </file>